--- a/public/lessons/year-6-maths/spring/week-17/find-non-benchmark-percentages/teaching-powerpoint-v1.pptx
+++ b/public/lessons/year-6-maths/spring/week-17/find-non-benchmark-percentages/teaching-powerpoint-v1.pptx
@@ -2,24 +2,24 @@
 <file path=ppt/presentation.xml><?xml version="1.0" encoding="utf-8"?>
 <p:presentation xmlns:p="http://schemas.openxmlformats.org/presentationml/2006/main">
   <p:sldMasterIdLst>
-    <p:sldMasterId xmlns:r="http://schemas.openxmlformats.org/officeDocument/2006/relationships" id="2147483648" r:id="Rb07500f53e2b4120"/>
+    <p:sldMasterId xmlns:r="http://schemas.openxmlformats.org/officeDocument/2006/relationships" id="2147483648" r:id="Rf9df5d9f31b44fc9"/>
   </p:sldMasterIdLst>
   <p:notesMasterIdLst>
-    <p:notesMasterId xmlns:r="http://schemas.openxmlformats.org/officeDocument/2006/relationships" r:id="Rb77be57ee166425b"/>
+    <p:notesMasterId xmlns:r="http://schemas.openxmlformats.org/officeDocument/2006/relationships" r:id="Refee127d4aeb4e11"/>
   </p:notesMasterIdLst>
   <p:sldIdLst>
-    <p:sldId xmlns:r="http://schemas.openxmlformats.org/officeDocument/2006/relationships" id="256" r:id="Re0f1826b291b4de3"/>
-    <p:sldId xmlns:r="http://schemas.openxmlformats.org/officeDocument/2006/relationships" id="257" r:id="Rf52648dcfe794feb"/>
-    <p:sldId xmlns:r="http://schemas.openxmlformats.org/officeDocument/2006/relationships" id="258" r:id="R540a4bccf8a243b0"/>
-    <p:sldId xmlns:r="http://schemas.openxmlformats.org/officeDocument/2006/relationships" id="259" r:id="Rbf8e8dcf0fa14d26"/>
-    <p:sldId xmlns:r="http://schemas.openxmlformats.org/officeDocument/2006/relationships" id="260" r:id="Rd01fb2beffe24430"/>
-    <p:sldId xmlns:r="http://schemas.openxmlformats.org/officeDocument/2006/relationships" id="261" r:id="Rd27e0f6bcd2846cc"/>
-    <p:sldId xmlns:r="http://schemas.openxmlformats.org/officeDocument/2006/relationships" id="262" r:id="Rfb0e32faa2354735"/>
-    <p:sldId xmlns:r="http://schemas.openxmlformats.org/officeDocument/2006/relationships" id="263" r:id="R669a32b0bbe64d12"/>
-    <p:sldId xmlns:r="http://schemas.openxmlformats.org/officeDocument/2006/relationships" id="264" r:id="R409bbeea6ae04a2c"/>
-    <p:sldId xmlns:r="http://schemas.openxmlformats.org/officeDocument/2006/relationships" id="265" r:id="R8aced95e96514c75"/>
-    <p:sldId xmlns:r="http://schemas.openxmlformats.org/officeDocument/2006/relationships" id="266" r:id="R2125c3a1eca940f3"/>
-    <p:sldId xmlns:r="http://schemas.openxmlformats.org/officeDocument/2006/relationships" id="267" r:id="Rda3d80c029ee4bef"/>
+    <p:sldId xmlns:r="http://schemas.openxmlformats.org/officeDocument/2006/relationships" id="256" r:id="R5f7221fe7ec54178"/>
+    <p:sldId xmlns:r="http://schemas.openxmlformats.org/officeDocument/2006/relationships" id="257" r:id="Rce3b7d5ee6174485"/>
+    <p:sldId xmlns:r="http://schemas.openxmlformats.org/officeDocument/2006/relationships" id="258" r:id="R07cd0cd1e4364826"/>
+    <p:sldId xmlns:r="http://schemas.openxmlformats.org/officeDocument/2006/relationships" id="259" r:id="Rb3aeb6313e1c4d8b"/>
+    <p:sldId xmlns:r="http://schemas.openxmlformats.org/officeDocument/2006/relationships" id="260" r:id="R29186aac1c254ffa"/>
+    <p:sldId xmlns:r="http://schemas.openxmlformats.org/officeDocument/2006/relationships" id="261" r:id="R3fa6cfc3a27b4882"/>
+    <p:sldId xmlns:r="http://schemas.openxmlformats.org/officeDocument/2006/relationships" id="262" r:id="R1e5f5e77d67e48a7"/>
+    <p:sldId xmlns:r="http://schemas.openxmlformats.org/officeDocument/2006/relationships" id="263" r:id="R3776ac6dfbd44821"/>
+    <p:sldId xmlns:r="http://schemas.openxmlformats.org/officeDocument/2006/relationships" id="264" r:id="R37652a3a418e474d"/>
+    <p:sldId xmlns:r="http://schemas.openxmlformats.org/officeDocument/2006/relationships" id="265" r:id="R90e30d78f56a4189"/>
+    <p:sldId xmlns:r="http://schemas.openxmlformats.org/officeDocument/2006/relationships" id="266" r:id="Rff16456286a5419c"/>
+    <p:sldId xmlns:r="http://schemas.openxmlformats.org/officeDocument/2006/relationships" id="267" r:id="R6bcef9d0dd504c33"/>
   </p:sldIdLst>
   <p:sldSz cx="12192000" cy="6858000"/>
   <p:notesSz cx="6858000" cy="9144000"/>
@@ -873,7 +873,7 @@
           <a:lstStyle xmlns:a="http://schemas.openxmlformats.org/drawingml/2006/main"/>
           <a:p xmlns:a="http://schemas.openxmlformats.org/drawingml/2006/main">
             <a:r>
-              <a:t>I do. Reveal the question, setup and each calculation stage one click at a time. Pupils watch before copying. Model answer: 168.</a:t>
+              <a:t>I do. Reveal the question, then reveal each mathematical change one click at a time. Point to the numbers and operation that changed before moving to the next line. Final answer: 168.</a:t>
             </a:r>
           </a:p>
         </p:txBody>
@@ -1291,7 +1291,7 @@
   </p:cSld>
   <p:clrMap bg1="lt1" tx1="dk1" bg2="lt2" tx2="dk2" accent1="accent1" accent2="accent2" accent3="accent3" accent4="accent4" accent5="accent5" accent6="accent6" hlink="hlink" folHlink="folHlink"/>
   <p:sldLayoutIdLst>
-    <p:sldLayoutId xmlns:r="http://schemas.openxmlformats.org/officeDocument/2006/relationships" id="2147483649" r:id="R167d8b88b15249e3"/>
+    <p:sldLayoutId xmlns:r="http://schemas.openxmlformats.org/officeDocument/2006/relationships" id="2147483649" r:id="R48f99b547a4f451f"/>
   </p:sldLayoutIdLst>
   <p:txStyles>
     <p:titleStyle>
@@ -1842,7 +1842,7 @@
           <p:cNvPr id="12" name="">
             <a:extLst xmlns:a="http://schemas.openxmlformats.org/drawingml/2006/main">
               <a:ext uri="{FF2B5EF4-FFF2-40B4-BE49-F238E27FC236}">
-                <a16:creationId xmlns:a16="http://schemas.microsoft.com/office/drawing/2014/main" id="{65186BF2-2BFE-4BA2-AA36-539937A21A31}"/>
+                <a16:creationId xmlns:a16="http://schemas.microsoft.com/office/drawing/2014/main" id="{E7517C4D-2EB8-4279-B29B-7BFAFD52DC37}"/>
               </a:ext>
             </a:extLst>
           </p:cNvPr>
@@ -1874,7 +1874,7 @@
           <p:cNvPr id="2" name="">
             <a:extLst xmlns:a="http://schemas.openxmlformats.org/drawingml/2006/main">
               <a:ext uri="{FF2B5EF4-FFF2-40B4-BE49-F238E27FC236}">
-                <a16:creationId xmlns:a16="http://schemas.microsoft.com/office/drawing/2014/main" id="{A907ED3E-DC39-4EFF-897A-3F4904BA8D88}"/>
+                <a16:creationId xmlns:a16="http://schemas.microsoft.com/office/drawing/2014/main" id="{9106E60B-8823-4D29-ACA1-21FB3A96F99D}"/>
               </a:ext>
             </a:extLst>
           </p:cNvPr>
@@ -1931,7 +1931,7 @@
           <p:cNvPr id="3" name="">
             <a:extLst xmlns:a="http://schemas.openxmlformats.org/drawingml/2006/main">
               <a:ext uri="{FF2B5EF4-FFF2-40B4-BE49-F238E27FC236}">
-                <a16:creationId xmlns:a16="http://schemas.microsoft.com/office/drawing/2014/main" id="{979282D3-FF75-486B-AD0E-F8042B300CBE}"/>
+                <a16:creationId xmlns:a16="http://schemas.microsoft.com/office/drawing/2014/main" id="{9D4002E9-6AB4-4EEF-BE57-4554EAAF0F28}"/>
               </a:ext>
             </a:extLst>
           </p:cNvPr>
@@ -1965,7 +1965,7 @@
           <p:cNvPr id="4" name="">
             <a:extLst xmlns:a="http://schemas.openxmlformats.org/drawingml/2006/main">
               <a:ext uri="{FF2B5EF4-FFF2-40B4-BE49-F238E27FC236}">
-                <a16:creationId xmlns:a16="http://schemas.microsoft.com/office/drawing/2014/main" id="{33918569-88A7-4996-9B26-6C96929B7662}"/>
+                <a16:creationId xmlns:a16="http://schemas.microsoft.com/office/drawing/2014/main" id="{ECB73AF1-D70F-4431-B3F6-622A59B62D53}"/>
               </a:ext>
             </a:extLst>
           </p:cNvPr>
@@ -2022,7 +2022,7 @@
           <p:cNvPr id="5" name="">
             <a:extLst xmlns:a="http://schemas.openxmlformats.org/drawingml/2006/main">
               <a:ext uri="{FF2B5EF4-FFF2-40B4-BE49-F238E27FC236}">
-                <a16:creationId xmlns:a16="http://schemas.microsoft.com/office/drawing/2014/main" id="{623BCE2B-15EB-4DB9-92E9-C56890F5E6E7}"/>
+                <a16:creationId xmlns:a16="http://schemas.microsoft.com/office/drawing/2014/main" id="{B0A7D263-B038-4444-A740-1000895EEE94}"/>
               </a:ext>
             </a:extLst>
           </p:cNvPr>
@@ -2079,7 +2079,7 @@
           <p:cNvPr id="6" name="">
             <a:extLst xmlns:a="http://schemas.openxmlformats.org/drawingml/2006/main">
               <a:ext uri="{FF2B5EF4-FFF2-40B4-BE49-F238E27FC236}">
-                <a16:creationId xmlns:a16="http://schemas.microsoft.com/office/drawing/2014/main" id="{C92EF161-B7B9-4EEB-9DCA-66902D4FD115}"/>
+                <a16:creationId xmlns:a16="http://schemas.microsoft.com/office/drawing/2014/main" id="{FA56E558-161B-42A1-803A-B555057F889E}"/>
               </a:ext>
             </a:extLst>
           </p:cNvPr>
@@ -2113,7 +2113,7 @@
           <p:cNvPr id="7" name="">
             <a:extLst xmlns:a="http://schemas.openxmlformats.org/drawingml/2006/main">
               <a:ext uri="{FF2B5EF4-FFF2-40B4-BE49-F238E27FC236}">
-                <a16:creationId xmlns:a16="http://schemas.microsoft.com/office/drawing/2014/main" id="{FD6DFF47-F4CA-40C1-B58B-F8E0D4AF478F}"/>
+                <a16:creationId xmlns:a16="http://schemas.microsoft.com/office/drawing/2014/main" id="{97B47AD7-231E-4515-A226-063BDD075515}"/>
               </a:ext>
             </a:extLst>
           </p:cNvPr>
@@ -2170,7 +2170,7 @@
           <p:cNvPr id="8" name="">
             <a:extLst xmlns:a="http://schemas.openxmlformats.org/drawingml/2006/main">
               <a:ext uri="{FF2B5EF4-FFF2-40B4-BE49-F238E27FC236}">
-                <a16:creationId xmlns:a16="http://schemas.microsoft.com/office/drawing/2014/main" id="{87140773-0174-4568-8122-C9CFA79979B2}"/>
+                <a16:creationId xmlns:a16="http://schemas.microsoft.com/office/drawing/2014/main" id="{9F58B8CD-349E-4675-81B5-4729C9D4A263}"/>
               </a:ext>
             </a:extLst>
           </p:cNvPr>
@@ -2227,7 +2227,7 @@
           <p:cNvPr id="9" name="">
             <a:extLst xmlns:a="http://schemas.openxmlformats.org/drawingml/2006/main">
               <a:ext uri="{FF2B5EF4-FFF2-40B4-BE49-F238E27FC236}">
-                <a16:creationId xmlns:a16="http://schemas.microsoft.com/office/drawing/2014/main" id="{BE428AE2-C263-4C94-8056-F874A0CDEACC}"/>
+                <a16:creationId xmlns:a16="http://schemas.microsoft.com/office/drawing/2014/main" id="{694309F5-59B7-46EF-8266-95DE9CF3B3C5}"/>
               </a:ext>
             </a:extLst>
           </p:cNvPr>
@@ -2284,7 +2284,7 @@
           <p:cNvPr id="10" name="">
             <a:extLst xmlns:a="http://schemas.openxmlformats.org/drawingml/2006/main">
               <a:ext uri="{FF2B5EF4-FFF2-40B4-BE49-F238E27FC236}">
-                <a16:creationId xmlns:a16="http://schemas.microsoft.com/office/drawing/2014/main" id="{D2A837AC-578D-4B2F-AE0A-3CE63BE53DA8}"/>
+                <a16:creationId xmlns:a16="http://schemas.microsoft.com/office/drawing/2014/main" id="{6C3F993A-3D2D-4A72-A45A-89B79853ACB5}"/>
               </a:ext>
             </a:extLst>
           </p:cNvPr>
@@ -2341,7 +2341,7 @@
           <p:cNvPr id="11" name="">
             <a:extLst xmlns:a="http://schemas.openxmlformats.org/drawingml/2006/main">
               <a:ext uri="{FF2B5EF4-FFF2-40B4-BE49-F238E27FC236}">
-                <a16:creationId xmlns:a16="http://schemas.microsoft.com/office/drawing/2014/main" id="{5C1E6B62-76B8-47D8-B78D-0734F7FAEB6E}"/>
+                <a16:creationId xmlns:a16="http://schemas.microsoft.com/office/drawing/2014/main" id="{E518364B-F5EE-4E78-9F4B-A4B7EDEABB39}"/>
               </a:ext>
             </a:extLst>
           </p:cNvPr>
@@ -2396,7 +2396,7 @@
     </p:spTree>
     <p:extLst>
       <p:ext uri="{BB962C8B-B14F-4D97-AF65-F5344CB8AC3E}">
-        <p14:creationId xmlns:p14="http://schemas.microsoft.com/office/powerpoint/2010/main" val="726871646"/>
+        <p14:creationId xmlns:p14="http://schemas.microsoft.com/office/powerpoint/2010/main" val="808572600"/>
       </p:ext>
     </p:extLst>
   </p:cSld>
@@ -2427,7 +2427,7 @@
           <p:cNvPr id="14" name="">
             <a:extLst xmlns:a="http://schemas.openxmlformats.org/drawingml/2006/main">
               <a:ext uri="{FF2B5EF4-FFF2-40B4-BE49-F238E27FC236}">
-                <a16:creationId xmlns:a16="http://schemas.microsoft.com/office/drawing/2014/main" id="{713E8A3E-5D8F-4CAC-B75D-F6774A9E59F0}"/>
+                <a16:creationId xmlns:a16="http://schemas.microsoft.com/office/drawing/2014/main" id="{74C99B11-AD19-4B42-9791-C2F96857745B}"/>
               </a:ext>
             </a:extLst>
           </p:cNvPr>
@@ -2459,7 +2459,7 @@
           <p:cNvPr id="2" name="">
             <a:extLst xmlns:a="http://schemas.openxmlformats.org/drawingml/2006/main">
               <a:ext uri="{FF2B5EF4-FFF2-40B4-BE49-F238E27FC236}">
-                <a16:creationId xmlns:a16="http://schemas.microsoft.com/office/drawing/2014/main" id="{E51E6E61-693C-42CC-BEFD-313AE511D998}"/>
+                <a16:creationId xmlns:a16="http://schemas.microsoft.com/office/drawing/2014/main" id="{78C8C722-96B4-4202-BBEB-3F0EE4E8F827}"/>
               </a:ext>
             </a:extLst>
           </p:cNvPr>
@@ -2516,7 +2516,7 @@
           <p:cNvPr id="3" name="">
             <a:extLst xmlns:a="http://schemas.openxmlformats.org/drawingml/2006/main">
               <a:ext uri="{FF2B5EF4-FFF2-40B4-BE49-F238E27FC236}">
-                <a16:creationId xmlns:a16="http://schemas.microsoft.com/office/drawing/2014/main" id="{66DAB83C-3DE9-4246-8AE2-7964187EE6C8}"/>
+                <a16:creationId xmlns:a16="http://schemas.microsoft.com/office/drawing/2014/main" id="{88926B6E-4C64-4D33-9A0F-10F6E4781E34}"/>
               </a:ext>
             </a:extLst>
           </p:cNvPr>
@@ -2548,7 +2548,7 @@
           <p:cNvPr id="4" name="">
             <a:extLst xmlns:a="http://schemas.openxmlformats.org/drawingml/2006/main">
               <a:ext uri="{FF2B5EF4-FFF2-40B4-BE49-F238E27FC236}">
-                <a16:creationId xmlns:a16="http://schemas.microsoft.com/office/drawing/2014/main" id="{F79F32C7-EBB5-466D-BBBE-49CE0F77BFB0}"/>
+                <a16:creationId xmlns:a16="http://schemas.microsoft.com/office/drawing/2014/main" id="{CD86774B-37F8-46F1-84BA-5F2B74094D39}"/>
               </a:ext>
             </a:extLst>
           </p:cNvPr>
@@ -2605,7 +2605,7 @@
           <p:cNvPr id="5" name="">
             <a:extLst xmlns:a="http://schemas.openxmlformats.org/drawingml/2006/main">
               <a:ext uri="{FF2B5EF4-FFF2-40B4-BE49-F238E27FC236}">
-                <a16:creationId xmlns:a16="http://schemas.microsoft.com/office/drawing/2014/main" id="{2444D828-B14B-40EE-B426-EF33AFAF1B70}"/>
+                <a16:creationId xmlns:a16="http://schemas.microsoft.com/office/drawing/2014/main" id="{43BD3520-AFDD-4C6B-842F-A68C97C15878}"/>
               </a:ext>
             </a:extLst>
           </p:cNvPr>
@@ -2662,7 +2662,7 @@
           <p:cNvPr id="6" name="">
             <a:extLst xmlns:a="http://schemas.openxmlformats.org/drawingml/2006/main">
               <a:ext uri="{FF2B5EF4-FFF2-40B4-BE49-F238E27FC236}">
-                <a16:creationId xmlns:a16="http://schemas.microsoft.com/office/drawing/2014/main" id="{24F0BA78-A38A-474F-AEE4-CAB418CAAC62}"/>
+                <a16:creationId xmlns:a16="http://schemas.microsoft.com/office/drawing/2014/main" id="{F44F8A6D-BA0B-435F-85FF-C2F5A62F1743}"/>
               </a:ext>
             </a:extLst>
           </p:cNvPr>
@@ -2719,7 +2719,7 @@
           <p:cNvPr id="7" name="">
             <a:extLst xmlns:a="http://schemas.openxmlformats.org/drawingml/2006/main">
               <a:ext uri="{FF2B5EF4-FFF2-40B4-BE49-F238E27FC236}">
-                <a16:creationId xmlns:a16="http://schemas.microsoft.com/office/drawing/2014/main" id="{40AD8C9B-8E77-44FA-804C-9A05FB39E220}"/>
+                <a16:creationId xmlns:a16="http://schemas.microsoft.com/office/drawing/2014/main" id="{C65D6D90-75B6-4AF0-87B1-E21677D83C2F}"/>
               </a:ext>
             </a:extLst>
           </p:cNvPr>
@@ -2751,7 +2751,7 @@
           <p:cNvPr id="8" name="">
             <a:extLst xmlns:a="http://schemas.openxmlformats.org/drawingml/2006/main">
               <a:ext uri="{FF2B5EF4-FFF2-40B4-BE49-F238E27FC236}">
-                <a16:creationId xmlns:a16="http://schemas.microsoft.com/office/drawing/2014/main" id="{5E1A217C-8678-4D41-81D3-644B9E83AEA9}"/>
+                <a16:creationId xmlns:a16="http://schemas.microsoft.com/office/drawing/2014/main" id="{5A06682F-1376-400A-969B-FFA0CC24579B}"/>
               </a:ext>
             </a:extLst>
           </p:cNvPr>
@@ -2808,7 +2808,7 @@
           <p:cNvPr id="9" name="">
             <a:extLst xmlns:a="http://schemas.openxmlformats.org/drawingml/2006/main">
               <a:ext uri="{FF2B5EF4-FFF2-40B4-BE49-F238E27FC236}">
-                <a16:creationId xmlns:a16="http://schemas.microsoft.com/office/drawing/2014/main" id="{5F944823-6F54-42C1-B224-3A5737A408C7}"/>
+                <a16:creationId xmlns:a16="http://schemas.microsoft.com/office/drawing/2014/main" id="{1CE6E4D6-D8C6-44C7-B6E2-70468EFA5511}"/>
               </a:ext>
             </a:extLst>
           </p:cNvPr>
@@ -2865,7 +2865,7 @@
           <p:cNvPr id="10" name="">
             <a:extLst xmlns:a="http://schemas.openxmlformats.org/drawingml/2006/main">
               <a:ext uri="{FF2B5EF4-FFF2-40B4-BE49-F238E27FC236}">
-                <a16:creationId xmlns:a16="http://schemas.microsoft.com/office/drawing/2014/main" id="{848FBD2E-9D3A-4ABC-8D66-7A283F51A8F8}"/>
+                <a16:creationId xmlns:a16="http://schemas.microsoft.com/office/drawing/2014/main" id="{04BA1E09-9967-4680-820B-F92009EA4474}"/>
               </a:ext>
             </a:extLst>
           </p:cNvPr>
@@ -2922,7 +2922,7 @@
           <p:cNvPr id="11" name="">
             <a:extLst xmlns:a="http://schemas.openxmlformats.org/drawingml/2006/main">
               <a:ext uri="{FF2B5EF4-FFF2-40B4-BE49-F238E27FC236}">
-                <a16:creationId xmlns:a16="http://schemas.microsoft.com/office/drawing/2014/main" id="{1B9D6335-2A2D-4916-97B6-19A15A4C2FBC}"/>
+                <a16:creationId xmlns:a16="http://schemas.microsoft.com/office/drawing/2014/main" id="{4FCF1BF8-1D1F-460D-8251-B08D6DDA690F}"/>
               </a:ext>
             </a:extLst>
           </p:cNvPr>
@@ -2979,7 +2979,7 @@
           <p:cNvPr id="12" name="">
             <a:extLst xmlns:a="http://schemas.openxmlformats.org/drawingml/2006/main">
               <a:ext uri="{FF2B5EF4-FFF2-40B4-BE49-F238E27FC236}">
-                <a16:creationId xmlns:a16="http://schemas.microsoft.com/office/drawing/2014/main" id="{F3F8CE13-1917-4E55-801E-2504B1635733}"/>
+                <a16:creationId xmlns:a16="http://schemas.microsoft.com/office/drawing/2014/main" id="{C491BBE4-B0DE-4142-99F9-8465C1F87AB6}"/>
               </a:ext>
             </a:extLst>
           </p:cNvPr>
@@ -3036,7 +3036,7 @@
           <p:cNvPr id="13" name="">
             <a:extLst xmlns:a="http://schemas.openxmlformats.org/drawingml/2006/main">
               <a:ext uri="{FF2B5EF4-FFF2-40B4-BE49-F238E27FC236}">
-                <a16:creationId xmlns:a16="http://schemas.microsoft.com/office/drawing/2014/main" id="{1AB2F2DE-F8BA-433E-AB56-A9A75C80B1C9}"/>
+                <a16:creationId xmlns:a16="http://schemas.microsoft.com/office/drawing/2014/main" id="{C5CBA1B8-A960-4F6E-BEAE-98B50DCA5EFA}"/>
               </a:ext>
             </a:extLst>
           </p:cNvPr>
@@ -3091,7 +3091,7 @@
     </p:spTree>
     <p:extLst>
       <p:ext uri="{BB962C8B-B14F-4D97-AF65-F5344CB8AC3E}">
-        <p14:creationId xmlns:p14="http://schemas.microsoft.com/office/powerpoint/2010/main" val="112300338"/>
+        <p14:creationId xmlns:p14="http://schemas.microsoft.com/office/powerpoint/2010/main" val="890081078"/>
       </p:ext>
     </p:extLst>
   </p:cSld>
@@ -3292,7 +3292,7 @@
           <p:cNvPr id="19" name="">
             <a:extLst xmlns:a="http://schemas.openxmlformats.org/drawingml/2006/main">
               <a:ext uri="{FF2B5EF4-FFF2-40B4-BE49-F238E27FC236}">
-                <a16:creationId xmlns:a16="http://schemas.microsoft.com/office/drawing/2014/main" id="{8BDBF6BF-1EE4-4D05-ABAE-EEDC56423391}"/>
+                <a16:creationId xmlns:a16="http://schemas.microsoft.com/office/drawing/2014/main" id="{2C56E17D-AA4E-4CA5-B643-8234303D9D08}"/>
               </a:ext>
             </a:extLst>
           </p:cNvPr>
@@ -3324,7 +3324,7 @@
           <p:cNvPr id="2" name="">
             <a:extLst xmlns:a="http://schemas.openxmlformats.org/drawingml/2006/main">
               <a:ext uri="{FF2B5EF4-FFF2-40B4-BE49-F238E27FC236}">
-                <a16:creationId xmlns:a16="http://schemas.microsoft.com/office/drawing/2014/main" id="{95A241A0-D5A5-4F91-8896-8B7F006A0DD9}"/>
+                <a16:creationId xmlns:a16="http://schemas.microsoft.com/office/drawing/2014/main" id="{B88F2A75-76F4-48F7-835F-15A439480AF7}"/>
               </a:ext>
             </a:extLst>
           </p:cNvPr>
@@ -3381,7 +3381,7 @@
           <p:cNvPr id="3" name="">
             <a:extLst xmlns:a="http://schemas.openxmlformats.org/drawingml/2006/main">
               <a:ext uri="{FF2B5EF4-FFF2-40B4-BE49-F238E27FC236}">
-                <a16:creationId xmlns:a16="http://schemas.microsoft.com/office/drawing/2014/main" id="{75DAA0DB-BDD6-4E32-8167-21A6C13026C9}"/>
+                <a16:creationId xmlns:a16="http://schemas.microsoft.com/office/drawing/2014/main" id="{417DF251-B809-4F99-8646-8275445D3879}"/>
               </a:ext>
             </a:extLst>
           </p:cNvPr>
@@ -3413,7 +3413,7 @@
           <p:cNvPr id="4" name="">
             <a:extLst xmlns:a="http://schemas.openxmlformats.org/drawingml/2006/main">
               <a:ext uri="{FF2B5EF4-FFF2-40B4-BE49-F238E27FC236}">
-                <a16:creationId xmlns:a16="http://schemas.microsoft.com/office/drawing/2014/main" id="{AC23B040-C122-40DF-98D8-FCCBA8A82C00}"/>
+                <a16:creationId xmlns:a16="http://schemas.microsoft.com/office/drawing/2014/main" id="{975FA034-4676-4FB7-93A3-B86ECE627572}"/>
               </a:ext>
             </a:extLst>
           </p:cNvPr>
@@ -3470,7 +3470,7 @@
           <p:cNvPr id="5" name="">
             <a:extLst xmlns:a="http://schemas.openxmlformats.org/drawingml/2006/main">
               <a:ext uri="{FF2B5EF4-FFF2-40B4-BE49-F238E27FC236}">
-                <a16:creationId xmlns:a16="http://schemas.microsoft.com/office/drawing/2014/main" id="{BC87E0D4-F86B-4549-B584-6EEE1D4A6344}"/>
+                <a16:creationId xmlns:a16="http://schemas.microsoft.com/office/drawing/2014/main" id="{915350F1-29CD-4F46-A88D-DF2BAE0D1FB2}"/>
               </a:ext>
             </a:extLst>
           </p:cNvPr>
@@ -3527,7 +3527,7 @@
           <p:cNvPr id="6" name="">
             <a:extLst xmlns:a="http://schemas.openxmlformats.org/drawingml/2006/main">
               <a:ext uri="{FF2B5EF4-FFF2-40B4-BE49-F238E27FC236}">
-                <a16:creationId xmlns:a16="http://schemas.microsoft.com/office/drawing/2014/main" id="{EFB2712E-9EB7-4927-A094-80227535A891}"/>
+                <a16:creationId xmlns:a16="http://schemas.microsoft.com/office/drawing/2014/main" id="{5981BF52-C509-47A2-8149-25619F9BC328}"/>
               </a:ext>
             </a:extLst>
           </p:cNvPr>
@@ -3584,7 +3584,7 @@
           <p:cNvPr id="7" name="">
             <a:extLst xmlns:a="http://schemas.openxmlformats.org/drawingml/2006/main">
               <a:ext uri="{FF2B5EF4-FFF2-40B4-BE49-F238E27FC236}">
-                <a16:creationId xmlns:a16="http://schemas.microsoft.com/office/drawing/2014/main" id="{43C2E4D7-87B3-4559-839A-03E476AEB322}"/>
+                <a16:creationId xmlns:a16="http://schemas.microsoft.com/office/drawing/2014/main" id="{8F9E3D11-46DF-4A9F-AC21-40CA3FD984BA}"/>
               </a:ext>
             </a:extLst>
           </p:cNvPr>
@@ -3616,7 +3616,7 @@
           <p:cNvPr id="8" name="">
             <a:extLst xmlns:a="http://schemas.openxmlformats.org/drawingml/2006/main">
               <a:ext uri="{FF2B5EF4-FFF2-40B4-BE49-F238E27FC236}">
-                <a16:creationId xmlns:a16="http://schemas.microsoft.com/office/drawing/2014/main" id="{F35ED059-B69E-428F-AB58-27735F75F8F7}"/>
+                <a16:creationId xmlns:a16="http://schemas.microsoft.com/office/drawing/2014/main" id="{43A68986-D6FC-4A51-97A3-D8C55A94D100}"/>
               </a:ext>
             </a:extLst>
           </p:cNvPr>
@@ -3673,7 +3673,7 @@
           <p:cNvPr id="9" name="">
             <a:extLst xmlns:a="http://schemas.openxmlformats.org/drawingml/2006/main">
               <a:ext uri="{FF2B5EF4-FFF2-40B4-BE49-F238E27FC236}">
-                <a16:creationId xmlns:a16="http://schemas.microsoft.com/office/drawing/2014/main" id="{2C3CA055-B314-4FA7-A933-CE2011B268AC}"/>
+                <a16:creationId xmlns:a16="http://schemas.microsoft.com/office/drawing/2014/main" id="{8FEF257F-3D94-4E64-B7D0-7047FF9643D8}"/>
               </a:ext>
             </a:extLst>
           </p:cNvPr>
@@ -3730,7 +3730,7 @@
           <p:cNvPr id="10" name="">
             <a:extLst xmlns:a="http://schemas.openxmlformats.org/drawingml/2006/main">
               <a:ext uri="{FF2B5EF4-FFF2-40B4-BE49-F238E27FC236}">
-                <a16:creationId xmlns:a16="http://schemas.microsoft.com/office/drawing/2014/main" id="{C3072DC2-874D-4464-BA0D-6D58F7E49120}"/>
+                <a16:creationId xmlns:a16="http://schemas.microsoft.com/office/drawing/2014/main" id="{2FD43FA9-8CD8-4528-811A-4A732485F0F1}"/>
               </a:ext>
             </a:extLst>
           </p:cNvPr>
@@ -3787,7 +3787,7 @@
           <p:cNvPr id="11" name="">
             <a:extLst xmlns:a="http://schemas.openxmlformats.org/drawingml/2006/main">
               <a:ext uri="{FF2B5EF4-FFF2-40B4-BE49-F238E27FC236}">
-                <a16:creationId xmlns:a16="http://schemas.microsoft.com/office/drawing/2014/main" id="{7F2CB36F-FDDE-4EAF-A033-0B47002CF0D2}"/>
+                <a16:creationId xmlns:a16="http://schemas.microsoft.com/office/drawing/2014/main" id="{9A40F25E-578D-4674-9D7F-BB23CFBFF110}"/>
               </a:ext>
             </a:extLst>
           </p:cNvPr>
@@ -3821,7 +3821,7 @@
           <p:cNvPr id="12" name="">
             <a:extLst xmlns:a="http://schemas.openxmlformats.org/drawingml/2006/main">
               <a:ext uri="{FF2B5EF4-FFF2-40B4-BE49-F238E27FC236}">
-                <a16:creationId xmlns:a16="http://schemas.microsoft.com/office/drawing/2014/main" id="{8D9D7FAA-6255-4E1C-A67C-EFC746D283FF}"/>
+                <a16:creationId xmlns:a16="http://schemas.microsoft.com/office/drawing/2014/main" id="{BC216F7A-3C89-4AA1-B876-F2D2FAA5C0BB}"/>
               </a:ext>
             </a:extLst>
           </p:cNvPr>
@@ -3878,7 +3878,7 @@
           <p:cNvPr id="13" name="">
             <a:extLst xmlns:a="http://schemas.openxmlformats.org/drawingml/2006/main">
               <a:ext uri="{FF2B5EF4-FFF2-40B4-BE49-F238E27FC236}">
-                <a16:creationId xmlns:a16="http://schemas.microsoft.com/office/drawing/2014/main" id="{6861A85C-0FCC-457D-8544-67103B6B416F}"/>
+                <a16:creationId xmlns:a16="http://schemas.microsoft.com/office/drawing/2014/main" id="{53AD67AD-16F5-497E-A70A-4E112DADF16A}"/>
               </a:ext>
             </a:extLst>
           </p:cNvPr>
@@ -3935,7 +3935,7 @@
           <p:cNvPr id="14" name="">
             <a:extLst xmlns:a="http://schemas.openxmlformats.org/drawingml/2006/main">
               <a:ext uri="{FF2B5EF4-FFF2-40B4-BE49-F238E27FC236}">
-                <a16:creationId xmlns:a16="http://schemas.microsoft.com/office/drawing/2014/main" id="{162BDB37-BD26-49D8-9010-76E71E09255F}"/>
+                <a16:creationId xmlns:a16="http://schemas.microsoft.com/office/drawing/2014/main" id="{0DBAC6F3-9A1C-435C-9EF2-D1603C46B010}"/>
               </a:ext>
             </a:extLst>
           </p:cNvPr>
@@ -3992,7 +3992,7 @@
           <p:cNvPr id="15" name="">
             <a:extLst xmlns:a="http://schemas.openxmlformats.org/drawingml/2006/main">
               <a:ext uri="{FF2B5EF4-FFF2-40B4-BE49-F238E27FC236}">
-                <a16:creationId xmlns:a16="http://schemas.microsoft.com/office/drawing/2014/main" id="{05BCEDAE-E90C-4AB4-91AC-D0385239251D}"/>
+                <a16:creationId xmlns:a16="http://schemas.microsoft.com/office/drawing/2014/main" id="{D1294E63-19EC-4014-8053-33BA8BB7C5CF}"/>
               </a:ext>
             </a:extLst>
           </p:cNvPr>
@@ -4026,7 +4026,7 @@
           <p:cNvPr id="16" name="">
             <a:extLst xmlns:a="http://schemas.openxmlformats.org/drawingml/2006/main">
               <a:ext uri="{FF2B5EF4-FFF2-40B4-BE49-F238E27FC236}">
-                <a16:creationId xmlns:a16="http://schemas.microsoft.com/office/drawing/2014/main" id="{BE1EC256-C3BC-42D6-9BAF-480F6B1B3F3D}"/>
+                <a16:creationId xmlns:a16="http://schemas.microsoft.com/office/drawing/2014/main" id="{EDDD99DD-F141-4DED-A404-885DB3A3FB87}"/>
               </a:ext>
             </a:extLst>
           </p:cNvPr>
@@ -4083,7 +4083,7 @@
           <p:cNvPr id="17" name="">
             <a:extLst xmlns:a="http://schemas.openxmlformats.org/drawingml/2006/main">
               <a:ext uri="{FF2B5EF4-FFF2-40B4-BE49-F238E27FC236}">
-                <a16:creationId xmlns:a16="http://schemas.microsoft.com/office/drawing/2014/main" id="{081AE90D-A3F7-4464-9C4D-7FD3438E0F3B}"/>
+                <a16:creationId xmlns:a16="http://schemas.microsoft.com/office/drawing/2014/main" id="{E5874E96-A41A-43F3-8542-930923B71705}"/>
               </a:ext>
             </a:extLst>
           </p:cNvPr>
@@ -4140,7 +4140,7 @@
           <p:cNvPr id="18" name="">
             <a:extLst xmlns:a="http://schemas.openxmlformats.org/drawingml/2006/main">
               <a:ext uri="{FF2B5EF4-FFF2-40B4-BE49-F238E27FC236}">
-                <a16:creationId xmlns:a16="http://schemas.microsoft.com/office/drawing/2014/main" id="{8FAF2F91-850E-4D43-9E57-0C308F732D14}"/>
+                <a16:creationId xmlns:a16="http://schemas.microsoft.com/office/drawing/2014/main" id="{D9BA8557-E801-4D31-8FC8-D1A6AB69918E}"/>
               </a:ext>
             </a:extLst>
           </p:cNvPr>
@@ -4195,7 +4195,7 @@
     </p:spTree>
     <p:extLst>
       <p:ext uri="{BB962C8B-B14F-4D97-AF65-F5344CB8AC3E}">
-        <p14:creationId xmlns:p14="http://schemas.microsoft.com/office/powerpoint/2010/main" val="2002763192"/>
+        <p14:creationId xmlns:p14="http://schemas.microsoft.com/office/powerpoint/2010/main" val="1390545504"/>
       </p:ext>
     </p:extLst>
   </p:cSld>
@@ -4350,7 +4350,7 @@
           <p:cNvPr id="23" name="">
             <a:extLst xmlns:a="http://schemas.openxmlformats.org/drawingml/2006/main">
               <a:ext uri="{FF2B5EF4-FFF2-40B4-BE49-F238E27FC236}">
-                <a16:creationId xmlns:a16="http://schemas.microsoft.com/office/drawing/2014/main" id="{DD43AF73-0888-4D2C-815B-4B406FB2F55A}"/>
+                <a16:creationId xmlns:a16="http://schemas.microsoft.com/office/drawing/2014/main" id="{F0EBF655-EC0B-4E89-AA36-414DF00109B8}"/>
               </a:ext>
             </a:extLst>
           </p:cNvPr>
@@ -4382,7 +4382,7 @@
           <p:cNvPr id="2" name="">
             <a:extLst xmlns:a="http://schemas.openxmlformats.org/drawingml/2006/main">
               <a:ext uri="{FF2B5EF4-FFF2-40B4-BE49-F238E27FC236}">
-                <a16:creationId xmlns:a16="http://schemas.microsoft.com/office/drawing/2014/main" id="{50FDA10F-F515-4021-933B-290C420C377B}"/>
+                <a16:creationId xmlns:a16="http://schemas.microsoft.com/office/drawing/2014/main" id="{CC56B3EC-3332-494D-AB20-C5A6A00C1B81}"/>
               </a:ext>
             </a:extLst>
           </p:cNvPr>
@@ -4439,7 +4439,7 @@
           <p:cNvPr id="3" name="">
             <a:extLst xmlns:a="http://schemas.openxmlformats.org/drawingml/2006/main">
               <a:ext uri="{FF2B5EF4-FFF2-40B4-BE49-F238E27FC236}">
-                <a16:creationId xmlns:a16="http://schemas.microsoft.com/office/drawing/2014/main" id="{B3803D3D-1EF5-475E-BBD3-0D11F13B5A5D}"/>
+                <a16:creationId xmlns:a16="http://schemas.microsoft.com/office/drawing/2014/main" id="{9592E742-0DA1-435C-AE6D-1AA89C6A2330}"/>
               </a:ext>
             </a:extLst>
           </p:cNvPr>
@@ -4471,7 +4471,7 @@
           <p:cNvPr id="4" name="">
             <a:extLst xmlns:a="http://schemas.openxmlformats.org/drawingml/2006/main">
               <a:ext uri="{FF2B5EF4-FFF2-40B4-BE49-F238E27FC236}">
-                <a16:creationId xmlns:a16="http://schemas.microsoft.com/office/drawing/2014/main" id="{B2316E4D-702C-4A68-8B10-643DFF065E3E}"/>
+                <a16:creationId xmlns:a16="http://schemas.microsoft.com/office/drawing/2014/main" id="{9075C4D0-6AC6-45B6-A376-9A69B18DC421}"/>
               </a:ext>
             </a:extLst>
           </p:cNvPr>
@@ -4528,7 +4528,7 @@
           <p:cNvPr id="5" name="">
             <a:extLst xmlns:a="http://schemas.openxmlformats.org/drawingml/2006/main">
               <a:ext uri="{FF2B5EF4-FFF2-40B4-BE49-F238E27FC236}">
-                <a16:creationId xmlns:a16="http://schemas.microsoft.com/office/drawing/2014/main" id="{ACBA5FE8-A749-4D1D-BFD9-3E05345C47DD}"/>
+                <a16:creationId xmlns:a16="http://schemas.microsoft.com/office/drawing/2014/main" id="{B6AC28AF-70F3-4C1F-AF8A-76216840FE39}"/>
               </a:ext>
             </a:extLst>
           </p:cNvPr>
@@ -4585,7 +4585,7 @@
           <p:cNvPr id="6" name="">
             <a:extLst xmlns:a="http://schemas.openxmlformats.org/drawingml/2006/main">
               <a:ext uri="{FF2B5EF4-FFF2-40B4-BE49-F238E27FC236}">
-                <a16:creationId xmlns:a16="http://schemas.microsoft.com/office/drawing/2014/main" id="{85373EC1-9E6F-4845-A63E-D71AE386DBBA}"/>
+                <a16:creationId xmlns:a16="http://schemas.microsoft.com/office/drawing/2014/main" id="{D44E0962-1852-44C0-84CA-2AEC76353D93}"/>
               </a:ext>
             </a:extLst>
           </p:cNvPr>
@@ -4642,7 +4642,7 @@
           <p:cNvPr id="7" name="">
             <a:extLst xmlns:a="http://schemas.openxmlformats.org/drawingml/2006/main">
               <a:ext uri="{FF2B5EF4-FFF2-40B4-BE49-F238E27FC236}">
-                <a16:creationId xmlns:a16="http://schemas.microsoft.com/office/drawing/2014/main" id="{33AD7111-4039-43C0-ADCA-990A6051A8F9}"/>
+                <a16:creationId xmlns:a16="http://schemas.microsoft.com/office/drawing/2014/main" id="{AF7DDEF6-985C-4233-8FD5-D4F0DA10382E}"/>
               </a:ext>
             </a:extLst>
           </p:cNvPr>
@@ -4674,7 +4674,7 @@
           <p:cNvPr id="8" name="">
             <a:extLst xmlns:a="http://schemas.openxmlformats.org/drawingml/2006/main">
               <a:ext uri="{FF2B5EF4-FFF2-40B4-BE49-F238E27FC236}">
-                <a16:creationId xmlns:a16="http://schemas.microsoft.com/office/drawing/2014/main" id="{7D82A67E-5068-497C-8C32-6CD35EA3573E}"/>
+                <a16:creationId xmlns:a16="http://schemas.microsoft.com/office/drawing/2014/main" id="{2A540A26-291C-4613-9F6F-340B386D4A80}"/>
               </a:ext>
             </a:extLst>
           </p:cNvPr>
@@ -4731,7 +4731,7 @@
           <p:cNvPr id="9" name="">
             <a:extLst xmlns:a="http://schemas.openxmlformats.org/drawingml/2006/main">
               <a:ext uri="{FF2B5EF4-FFF2-40B4-BE49-F238E27FC236}">
-                <a16:creationId xmlns:a16="http://schemas.microsoft.com/office/drawing/2014/main" id="{136086D7-A052-4981-8B2E-B40083A9C5FE}"/>
+                <a16:creationId xmlns:a16="http://schemas.microsoft.com/office/drawing/2014/main" id="{4A7E9D9A-1034-45EC-A1AC-8F54C82CBFEA}"/>
               </a:ext>
             </a:extLst>
           </p:cNvPr>
@@ -4788,7 +4788,7 @@
           <p:cNvPr id="10" name="">
             <a:extLst xmlns:a="http://schemas.openxmlformats.org/drawingml/2006/main">
               <a:ext uri="{FF2B5EF4-FFF2-40B4-BE49-F238E27FC236}">
-                <a16:creationId xmlns:a16="http://schemas.microsoft.com/office/drawing/2014/main" id="{B0A6D82B-A1BA-4815-87A3-39859CFF6341}"/>
+                <a16:creationId xmlns:a16="http://schemas.microsoft.com/office/drawing/2014/main" id="{02B53274-E9DD-4211-BE93-25CBE16332C1}"/>
               </a:ext>
             </a:extLst>
           </p:cNvPr>
@@ -4822,7 +4822,7 @@
           <p:cNvPr id="11" name="">
             <a:extLst xmlns:a="http://schemas.openxmlformats.org/drawingml/2006/main">
               <a:ext uri="{FF2B5EF4-FFF2-40B4-BE49-F238E27FC236}">
-                <a16:creationId xmlns:a16="http://schemas.microsoft.com/office/drawing/2014/main" id="{76854AEE-2863-4D68-AA3D-3983A6810C9F}"/>
+                <a16:creationId xmlns:a16="http://schemas.microsoft.com/office/drawing/2014/main" id="{ED0D87FD-BA00-4119-8EEF-98E5C7E6DCA1}"/>
               </a:ext>
             </a:extLst>
           </p:cNvPr>
@@ -4854,7 +4854,7 @@
           <p:cNvPr id="12" name="">
             <a:extLst xmlns:a="http://schemas.openxmlformats.org/drawingml/2006/main">
               <a:ext uri="{FF2B5EF4-FFF2-40B4-BE49-F238E27FC236}">
-                <a16:creationId xmlns:a16="http://schemas.microsoft.com/office/drawing/2014/main" id="{65AABDED-0646-4F95-A3EE-2650B6D57490}"/>
+                <a16:creationId xmlns:a16="http://schemas.microsoft.com/office/drawing/2014/main" id="{E2D445E6-0B07-40E2-86D9-03527B288C4C}"/>
               </a:ext>
             </a:extLst>
           </p:cNvPr>
@@ -4911,7 +4911,7 @@
           <p:cNvPr id="13" name="">
             <a:extLst xmlns:a="http://schemas.openxmlformats.org/drawingml/2006/main">
               <a:ext uri="{FF2B5EF4-FFF2-40B4-BE49-F238E27FC236}">
-                <a16:creationId xmlns:a16="http://schemas.microsoft.com/office/drawing/2014/main" id="{1953F2EA-D8A7-4B91-BBDE-7A1036ED8F39}"/>
+                <a16:creationId xmlns:a16="http://schemas.microsoft.com/office/drawing/2014/main" id="{8D563E1F-D544-445F-B7BC-642C58DEE0BF}"/>
               </a:ext>
             </a:extLst>
           </p:cNvPr>
@@ -4968,7 +4968,7 @@
           <p:cNvPr id="14" name="">
             <a:extLst xmlns:a="http://schemas.openxmlformats.org/drawingml/2006/main">
               <a:ext uri="{FF2B5EF4-FFF2-40B4-BE49-F238E27FC236}">
-                <a16:creationId xmlns:a16="http://schemas.microsoft.com/office/drawing/2014/main" id="{129C3209-86CC-4B33-9624-A090D8B125D0}"/>
+                <a16:creationId xmlns:a16="http://schemas.microsoft.com/office/drawing/2014/main" id="{5F9FA316-CFD8-4166-8E34-9E0D266B0F0C}"/>
               </a:ext>
             </a:extLst>
           </p:cNvPr>
@@ -5002,7 +5002,7 @@
           <p:cNvPr id="15" name="">
             <a:extLst xmlns:a="http://schemas.openxmlformats.org/drawingml/2006/main">
               <a:ext uri="{FF2B5EF4-FFF2-40B4-BE49-F238E27FC236}">
-                <a16:creationId xmlns:a16="http://schemas.microsoft.com/office/drawing/2014/main" id="{6808258D-9156-4E29-860E-5ABF3FF031C1}"/>
+                <a16:creationId xmlns:a16="http://schemas.microsoft.com/office/drawing/2014/main" id="{204FB4AC-6575-4A55-9144-5FA04DF4541D}"/>
               </a:ext>
             </a:extLst>
           </p:cNvPr>
@@ -5034,7 +5034,7 @@
           <p:cNvPr id="16" name="">
             <a:extLst xmlns:a="http://schemas.openxmlformats.org/drawingml/2006/main">
               <a:ext uri="{FF2B5EF4-FFF2-40B4-BE49-F238E27FC236}">
-                <a16:creationId xmlns:a16="http://schemas.microsoft.com/office/drawing/2014/main" id="{B3B5B869-6BC8-4189-AD6A-FA117162E845}"/>
+                <a16:creationId xmlns:a16="http://schemas.microsoft.com/office/drawing/2014/main" id="{BB5F1181-CE09-4228-A645-0AA4F2FF7D22}"/>
               </a:ext>
             </a:extLst>
           </p:cNvPr>
@@ -5091,7 +5091,7 @@
           <p:cNvPr id="17" name="">
             <a:extLst xmlns:a="http://schemas.openxmlformats.org/drawingml/2006/main">
               <a:ext uri="{FF2B5EF4-FFF2-40B4-BE49-F238E27FC236}">
-                <a16:creationId xmlns:a16="http://schemas.microsoft.com/office/drawing/2014/main" id="{83470F24-70A0-4522-AB5F-FF9FC205F1DE}"/>
+                <a16:creationId xmlns:a16="http://schemas.microsoft.com/office/drawing/2014/main" id="{D0B7412F-7D61-4C12-B6DF-3A1269BA4DEF}"/>
               </a:ext>
             </a:extLst>
           </p:cNvPr>
@@ -5148,7 +5148,7 @@
           <p:cNvPr id="18" name="">
             <a:extLst xmlns:a="http://schemas.openxmlformats.org/drawingml/2006/main">
               <a:ext uri="{FF2B5EF4-FFF2-40B4-BE49-F238E27FC236}">
-                <a16:creationId xmlns:a16="http://schemas.microsoft.com/office/drawing/2014/main" id="{9A3C7179-40D7-4F7C-9863-2479A1BDF59F}"/>
+                <a16:creationId xmlns:a16="http://schemas.microsoft.com/office/drawing/2014/main" id="{23974416-156E-48DA-83E5-4132B7732CDC}"/>
               </a:ext>
             </a:extLst>
           </p:cNvPr>
@@ -5182,7 +5182,7 @@
           <p:cNvPr id="19" name="">
             <a:extLst xmlns:a="http://schemas.openxmlformats.org/drawingml/2006/main">
               <a:ext uri="{FF2B5EF4-FFF2-40B4-BE49-F238E27FC236}">
-                <a16:creationId xmlns:a16="http://schemas.microsoft.com/office/drawing/2014/main" id="{F50765F2-95AF-4E64-8089-5182D005E7FC}"/>
+                <a16:creationId xmlns:a16="http://schemas.microsoft.com/office/drawing/2014/main" id="{40F0AB76-36FA-43BB-B1EF-E623C439D775}"/>
               </a:ext>
             </a:extLst>
           </p:cNvPr>
@@ -5214,7 +5214,7 @@
           <p:cNvPr id="20" name="">
             <a:extLst xmlns:a="http://schemas.openxmlformats.org/drawingml/2006/main">
               <a:ext uri="{FF2B5EF4-FFF2-40B4-BE49-F238E27FC236}">
-                <a16:creationId xmlns:a16="http://schemas.microsoft.com/office/drawing/2014/main" id="{C19F5B48-7750-4A20-A7A4-77010FA7E663}"/>
+                <a16:creationId xmlns:a16="http://schemas.microsoft.com/office/drawing/2014/main" id="{54ADA269-38D2-4181-9B4A-A4426EE25721}"/>
               </a:ext>
             </a:extLst>
           </p:cNvPr>
@@ -5271,7 +5271,7 @@
           <p:cNvPr id="21" name="">
             <a:extLst xmlns:a="http://schemas.openxmlformats.org/drawingml/2006/main">
               <a:ext uri="{FF2B5EF4-FFF2-40B4-BE49-F238E27FC236}">
-                <a16:creationId xmlns:a16="http://schemas.microsoft.com/office/drawing/2014/main" id="{F8941AD3-CEAB-409F-A989-D9D8B1FDB18D}"/>
+                <a16:creationId xmlns:a16="http://schemas.microsoft.com/office/drawing/2014/main" id="{78F9A341-0620-46ED-AADE-76E2028649D6}"/>
               </a:ext>
             </a:extLst>
           </p:cNvPr>
@@ -5328,7 +5328,7 @@
           <p:cNvPr id="22" name="">
             <a:extLst xmlns:a="http://schemas.openxmlformats.org/drawingml/2006/main">
               <a:ext uri="{FF2B5EF4-FFF2-40B4-BE49-F238E27FC236}">
-                <a16:creationId xmlns:a16="http://schemas.microsoft.com/office/drawing/2014/main" id="{8D5FA1DE-735E-47BA-B9D1-BA7349E6EEA7}"/>
+                <a16:creationId xmlns:a16="http://schemas.microsoft.com/office/drawing/2014/main" id="{665CE711-8FC2-4AB9-B3DE-3D20C245C761}"/>
               </a:ext>
             </a:extLst>
           </p:cNvPr>
@@ -5383,7 +5383,7 @@
     </p:spTree>
     <p:extLst>
       <p:ext uri="{BB962C8B-B14F-4D97-AF65-F5344CB8AC3E}">
-        <p14:creationId xmlns:p14="http://schemas.microsoft.com/office/powerpoint/2010/main" val="919540109"/>
+        <p14:creationId xmlns:p14="http://schemas.microsoft.com/office/powerpoint/2010/main" val="602096263"/>
       </p:ext>
     </p:extLst>
   </p:cSld>
@@ -5584,7 +5584,7 @@
           <p:cNvPr id="23" name="">
             <a:extLst xmlns:a="http://schemas.openxmlformats.org/drawingml/2006/main">
               <a:ext uri="{FF2B5EF4-FFF2-40B4-BE49-F238E27FC236}">
-                <a16:creationId xmlns:a16="http://schemas.microsoft.com/office/drawing/2014/main" id="{84359C2A-D027-44F1-85DE-6973AA11844A}"/>
+                <a16:creationId xmlns:a16="http://schemas.microsoft.com/office/drawing/2014/main" id="{E9CBCD6D-E052-487E-9DAA-25927E2398D8}"/>
               </a:ext>
             </a:extLst>
           </p:cNvPr>
@@ -5616,7 +5616,7 @@
           <p:cNvPr id="2" name="">
             <a:extLst xmlns:a="http://schemas.openxmlformats.org/drawingml/2006/main">
               <a:ext uri="{FF2B5EF4-FFF2-40B4-BE49-F238E27FC236}">
-                <a16:creationId xmlns:a16="http://schemas.microsoft.com/office/drawing/2014/main" id="{6627FD54-8AF5-4818-9BD8-085E21330F19}"/>
+                <a16:creationId xmlns:a16="http://schemas.microsoft.com/office/drawing/2014/main" id="{2D3B7781-E523-4269-AB16-69CE54CA0877}"/>
               </a:ext>
             </a:extLst>
           </p:cNvPr>
@@ -5673,7 +5673,7 @@
           <p:cNvPr id="3" name="">
             <a:extLst xmlns:a="http://schemas.openxmlformats.org/drawingml/2006/main">
               <a:ext uri="{FF2B5EF4-FFF2-40B4-BE49-F238E27FC236}">
-                <a16:creationId xmlns:a16="http://schemas.microsoft.com/office/drawing/2014/main" id="{DFAF36D7-C3F3-474B-9157-542AFAA34DF7}"/>
+                <a16:creationId xmlns:a16="http://schemas.microsoft.com/office/drawing/2014/main" id="{E07134B3-E6FE-4854-A9C2-C9E3D9ACDD44}"/>
               </a:ext>
             </a:extLst>
           </p:cNvPr>
@@ -5705,7 +5705,7 @@
           <p:cNvPr id="4" name="">
             <a:extLst xmlns:a="http://schemas.openxmlformats.org/drawingml/2006/main">
               <a:ext uri="{FF2B5EF4-FFF2-40B4-BE49-F238E27FC236}">
-                <a16:creationId xmlns:a16="http://schemas.microsoft.com/office/drawing/2014/main" id="{76893C8B-0170-455B-B007-F493C20A63DA}"/>
+                <a16:creationId xmlns:a16="http://schemas.microsoft.com/office/drawing/2014/main" id="{22ED5501-9C7B-4A9A-BA3F-168C5E8FA5F2}"/>
               </a:ext>
             </a:extLst>
           </p:cNvPr>
@@ -5762,7 +5762,7 @@
           <p:cNvPr id="5" name="">
             <a:extLst xmlns:a="http://schemas.openxmlformats.org/drawingml/2006/main">
               <a:ext uri="{FF2B5EF4-FFF2-40B4-BE49-F238E27FC236}">
-                <a16:creationId xmlns:a16="http://schemas.microsoft.com/office/drawing/2014/main" id="{096DDC25-5624-4C1B-AE19-A86319767869}"/>
+                <a16:creationId xmlns:a16="http://schemas.microsoft.com/office/drawing/2014/main" id="{B0F3262C-AF2D-4AD4-8BA2-A3F8201D1DAF}"/>
               </a:ext>
             </a:extLst>
           </p:cNvPr>
@@ -5819,7 +5819,7 @@
           <p:cNvPr id="6" name="">
             <a:extLst xmlns:a="http://schemas.openxmlformats.org/drawingml/2006/main">
               <a:ext uri="{FF2B5EF4-FFF2-40B4-BE49-F238E27FC236}">
-                <a16:creationId xmlns:a16="http://schemas.microsoft.com/office/drawing/2014/main" id="{6F15C570-8AEF-46A2-BD96-C5621D34A284}"/>
+                <a16:creationId xmlns:a16="http://schemas.microsoft.com/office/drawing/2014/main" id="{FAE4BE9B-CBC8-452E-971E-C401C145CC63}"/>
               </a:ext>
             </a:extLst>
           </p:cNvPr>
@@ -5876,7 +5876,7 @@
           <p:cNvPr id="7" name="">
             <a:extLst xmlns:a="http://schemas.openxmlformats.org/drawingml/2006/main">
               <a:ext uri="{FF2B5EF4-FFF2-40B4-BE49-F238E27FC236}">
-                <a16:creationId xmlns:a16="http://schemas.microsoft.com/office/drawing/2014/main" id="{6AE359E9-7D61-4B14-B6EA-E6B94610B824}"/>
+                <a16:creationId xmlns:a16="http://schemas.microsoft.com/office/drawing/2014/main" id="{FFFF06EA-54E8-4B7C-B679-3E64D179F148}"/>
               </a:ext>
             </a:extLst>
           </p:cNvPr>
@@ -5908,7 +5908,7 @@
           <p:cNvPr id="8" name="">
             <a:extLst xmlns:a="http://schemas.openxmlformats.org/drawingml/2006/main">
               <a:ext uri="{FF2B5EF4-FFF2-40B4-BE49-F238E27FC236}">
-                <a16:creationId xmlns:a16="http://schemas.microsoft.com/office/drawing/2014/main" id="{E6C7EC7B-DCC1-4BCE-B6EE-5C7C902579FD}"/>
+                <a16:creationId xmlns:a16="http://schemas.microsoft.com/office/drawing/2014/main" id="{11A546BB-F73D-40C6-B71F-438D430A9469}"/>
               </a:ext>
             </a:extLst>
           </p:cNvPr>
@@ -5965,7 +5965,7 @@
           <p:cNvPr id="9" name="">
             <a:extLst xmlns:a="http://schemas.openxmlformats.org/drawingml/2006/main">
               <a:ext uri="{FF2B5EF4-FFF2-40B4-BE49-F238E27FC236}">
-                <a16:creationId xmlns:a16="http://schemas.microsoft.com/office/drawing/2014/main" id="{426B54D3-BAD6-48D3-AFAD-3A4877A1973E}"/>
+                <a16:creationId xmlns:a16="http://schemas.microsoft.com/office/drawing/2014/main" id="{33E769BE-64F1-4BF9-BEEF-AF72A9B87FDD}"/>
               </a:ext>
             </a:extLst>
           </p:cNvPr>
@@ -6022,7 +6022,7 @@
           <p:cNvPr id="10" name="">
             <a:extLst xmlns:a="http://schemas.openxmlformats.org/drawingml/2006/main">
               <a:ext uri="{FF2B5EF4-FFF2-40B4-BE49-F238E27FC236}">
-                <a16:creationId xmlns:a16="http://schemas.microsoft.com/office/drawing/2014/main" id="{768FC162-24FF-4FE0-A668-00CAA78A0AF8}"/>
+                <a16:creationId xmlns:a16="http://schemas.microsoft.com/office/drawing/2014/main" id="{FD9D0335-292B-4AA8-8409-09FF460592BE}"/>
               </a:ext>
             </a:extLst>
           </p:cNvPr>
@@ -6056,7 +6056,7 @@
           <p:cNvPr id="11" name="">
             <a:extLst xmlns:a="http://schemas.openxmlformats.org/drawingml/2006/main">
               <a:ext uri="{FF2B5EF4-FFF2-40B4-BE49-F238E27FC236}">
-                <a16:creationId xmlns:a16="http://schemas.microsoft.com/office/drawing/2014/main" id="{4E07D25E-97E4-4340-956C-8A0688B0F065}"/>
+                <a16:creationId xmlns:a16="http://schemas.microsoft.com/office/drawing/2014/main" id="{DBDDE334-7984-4ECD-A6F3-46358B8D4660}"/>
               </a:ext>
             </a:extLst>
           </p:cNvPr>
@@ -6088,7 +6088,7 @@
           <p:cNvPr id="12" name="">
             <a:extLst xmlns:a="http://schemas.openxmlformats.org/drawingml/2006/main">
               <a:ext uri="{FF2B5EF4-FFF2-40B4-BE49-F238E27FC236}">
-                <a16:creationId xmlns:a16="http://schemas.microsoft.com/office/drawing/2014/main" id="{8F6EB45B-6B24-4A8F-BD4D-020457542327}"/>
+                <a16:creationId xmlns:a16="http://schemas.microsoft.com/office/drawing/2014/main" id="{6C5D3564-EA30-4A3C-B2D0-3E59FB24E7DB}"/>
               </a:ext>
             </a:extLst>
           </p:cNvPr>
@@ -6145,7 +6145,7 @@
           <p:cNvPr id="13" name="">
             <a:extLst xmlns:a="http://schemas.openxmlformats.org/drawingml/2006/main">
               <a:ext uri="{FF2B5EF4-FFF2-40B4-BE49-F238E27FC236}">
-                <a16:creationId xmlns:a16="http://schemas.microsoft.com/office/drawing/2014/main" id="{6BDD036A-70F7-440C-AC5E-93B285AAFDDC}"/>
+                <a16:creationId xmlns:a16="http://schemas.microsoft.com/office/drawing/2014/main" id="{899DCAF9-54B6-4E10-BF57-D6223DE905BC}"/>
               </a:ext>
             </a:extLst>
           </p:cNvPr>
@@ -6202,7 +6202,7 @@
           <p:cNvPr id="14" name="">
             <a:extLst xmlns:a="http://schemas.openxmlformats.org/drawingml/2006/main">
               <a:ext uri="{FF2B5EF4-FFF2-40B4-BE49-F238E27FC236}">
-                <a16:creationId xmlns:a16="http://schemas.microsoft.com/office/drawing/2014/main" id="{88053BAC-17FC-4807-B2A4-06784CAABABB}"/>
+                <a16:creationId xmlns:a16="http://schemas.microsoft.com/office/drawing/2014/main" id="{A37BAE70-944F-40D3-A75E-F23DAEC56A38}"/>
               </a:ext>
             </a:extLst>
           </p:cNvPr>
@@ -6236,7 +6236,7 @@
           <p:cNvPr id="15" name="">
             <a:extLst xmlns:a="http://schemas.openxmlformats.org/drawingml/2006/main">
               <a:ext uri="{FF2B5EF4-FFF2-40B4-BE49-F238E27FC236}">
-                <a16:creationId xmlns:a16="http://schemas.microsoft.com/office/drawing/2014/main" id="{8367DDF4-055E-44DB-AF99-E376D9F3EDB5}"/>
+                <a16:creationId xmlns:a16="http://schemas.microsoft.com/office/drawing/2014/main" id="{CA6460CD-488D-4891-AA79-41C3BFAA5A81}"/>
               </a:ext>
             </a:extLst>
           </p:cNvPr>
@@ -6268,7 +6268,7 @@
           <p:cNvPr id="16" name="">
             <a:extLst xmlns:a="http://schemas.openxmlformats.org/drawingml/2006/main">
               <a:ext uri="{FF2B5EF4-FFF2-40B4-BE49-F238E27FC236}">
-                <a16:creationId xmlns:a16="http://schemas.microsoft.com/office/drawing/2014/main" id="{EA77AE5E-5ABE-4D5D-8F57-945CC0394245}"/>
+                <a16:creationId xmlns:a16="http://schemas.microsoft.com/office/drawing/2014/main" id="{7ED291D6-CFCC-44DA-85CA-8280A3D1D7B6}"/>
               </a:ext>
             </a:extLst>
           </p:cNvPr>
@@ -6325,7 +6325,7 @@
           <p:cNvPr id="17" name="">
             <a:extLst xmlns:a="http://schemas.openxmlformats.org/drawingml/2006/main">
               <a:ext uri="{FF2B5EF4-FFF2-40B4-BE49-F238E27FC236}">
-                <a16:creationId xmlns:a16="http://schemas.microsoft.com/office/drawing/2014/main" id="{3C1CB2A9-14B4-4398-A7C8-09928C545B39}"/>
+                <a16:creationId xmlns:a16="http://schemas.microsoft.com/office/drawing/2014/main" id="{D9604397-5F52-41CC-99B1-C1DC49F453DB}"/>
               </a:ext>
             </a:extLst>
           </p:cNvPr>
@@ -6382,7 +6382,7 @@
           <p:cNvPr id="18" name="">
             <a:extLst xmlns:a="http://schemas.openxmlformats.org/drawingml/2006/main">
               <a:ext uri="{FF2B5EF4-FFF2-40B4-BE49-F238E27FC236}">
-                <a16:creationId xmlns:a16="http://schemas.microsoft.com/office/drawing/2014/main" id="{527AB8EE-6557-4405-9B6B-64B4C48F6443}"/>
+                <a16:creationId xmlns:a16="http://schemas.microsoft.com/office/drawing/2014/main" id="{1E542A9B-D882-4299-994B-20C8C95B6243}"/>
               </a:ext>
             </a:extLst>
           </p:cNvPr>
@@ -6416,7 +6416,7 @@
           <p:cNvPr id="19" name="">
             <a:extLst xmlns:a="http://schemas.openxmlformats.org/drawingml/2006/main">
               <a:ext uri="{FF2B5EF4-FFF2-40B4-BE49-F238E27FC236}">
-                <a16:creationId xmlns:a16="http://schemas.microsoft.com/office/drawing/2014/main" id="{CB0C6913-B123-4449-9A42-9918B5A3C7F2}"/>
+                <a16:creationId xmlns:a16="http://schemas.microsoft.com/office/drawing/2014/main" id="{4BFE015C-32ED-4972-B62D-05530C755671}"/>
               </a:ext>
             </a:extLst>
           </p:cNvPr>
@@ -6448,7 +6448,7 @@
           <p:cNvPr id="20" name="">
             <a:extLst xmlns:a="http://schemas.openxmlformats.org/drawingml/2006/main">
               <a:ext uri="{FF2B5EF4-FFF2-40B4-BE49-F238E27FC236}">
-                <a16:creationId xmlns:a16="http://schemas.microsoft.com/office/drawing/2014/main" id="{07FAACEC-7F47-444C-B19E-7A9AEC14438B}"/>
+                <a16:creationId xmlns:a16="http://schemas.microsoft.com/office/drawing/2014/main" id="{90A7759C-DDDC-4FBB-A41B-88DBA19F3F81}"/>
               </a:ext>
             </a:extLst>
           </p:cNvPr>
@@ -6505,7 +6505,7 @@
           <p:cNvPr id="21" name="">
             <a:extLst xmlns:a="http://schemas.openxmlformats.org/drawingml/2006/main">
               <a:ext uri="{FF2B5EF4-FFF2-40B4-BE49-F238E27FC236}">
-                <a16:creationId xmlns:a16="http://schemas.microsoft.com/office/drawing/2014/main" id="{F95AC260-417F-4DBD-A373-CBCC76E4F958}"/>
+                <a16:creationId xmlns:a16="http://schemas.microsoft.com/office/drawing/2014/main" id="{73D424F4-6F75-491A-AF9B-93E29EA53718}"/>
               </a:ext>
             </a:extLst>
           </p:cNvPr>
@@ -6562,7 +6562,7 @@
           <p:cNvPr id="22" name="">
             <a:extLst xmlns:a="http://schemas.openxmlformats.org/drawingml/2006/main">
               <a:ext uri="{FF2B5EF4-FFF2-40B4-BE49-F238E27FC236}">
-                <a16:creationId xmlns:a16="http://schemas.microsoft.com/office/drawing/2014/main" id="{EDA82464-A343-4272-845F-4F3431A2CA81}"/>
+                <a16:creationId xmlns:a16="http://schemas.microsoft.com/office/drawing/2014/main" id="{B32DDB79-26E2-4588-99AB-09B8B41F7E52}"/>
               </a:ext>
             </a:extLst>
           </p:cNvPr>
@@ -6617,7 +6617,7 @@
     </p:spTree>
     <p:extLst>
       <p:ext uri="{BB962C8B-B14F-4D97-AF65-F5344CB8AC3E}">
-        <p14:creationId xmlns:p14="http://schemas.microsoft.com/office/powerpoint/2010/main" val="1044874874"/>
+        <p14:creationId xmlns:p14="http://schemas.microsoft.com/office/powerpoint/2010/main" val="1605956299"/>
       </p:ext>
     </p:extLst>
   </p:cSld>
@@ -6818,7 +6818,7 @@
           <p:cNvPr id="16" name="">
             <a:extLst xmlns:a="http://schemas.openxmlformats.org/drawingml/2006/main">
               <a:ext uri="{FF2B5EF4-FFF2-40B4-BE49-F238E27FC236}">
-                <a16:creationId xmlns:a16="http://schemas.microsoft.com/office/drawing/2014/main" id="{1DEC2D53-BFC6-459F-AD03-E7E97A44098D}"/>
+                <a16:creationId xmlns:a16="http://schemas.microsoft.com/office/drawing/2014/main" id="{6409D617-48E2-47F1-BBFA-3EEBE05A8A96}"/>
               </a:ext>
             </a:extLst>
           </p:cNvPr>
@@ -6850,7 +6850,7 @@
           <p:cNvPr id="2" name="">
             <a:extLst xmlns:a="http://schemas.openxmlformats.org/drawingml/2006/main">
               <a:ext uri="{FF2B5EF4-FFF2-40B4-BE49-F238E27FC236}">
-                <a16:creationId xmlns:a16="http://schemas.microsoft.com/office/drawing/2014/main" id="{D2072290-5E62-4E12-B709-DF4D0FEFC7E2}"/>
+                <a16:creationId xmlns:a16="http://schemas.microsoft.com/office/drawing/2014/main" id="{FB76F0A2-F99C-49D9-91BB-251DC30B8435}"/>
               </a:ext>
             </a:extLst>
           </p:cNvPr>
@@ -6907,7 +6907,7 @@
           <p:cNvPr id="3" name="">
             <a:extLst xmlns:a="http://schemas.openxmlformats.org/drawingml/2006/main">
               <a:ext uri="{FF2B5EF4-FFF2-40B4-BE49-F238E27FC236}">
-                <a16:creationId xmlns:a16="http://schemas.microsoft.com/office/drawing/2014/main" id="{321D8710-E050-4E9C-B90E-8A2B474C7C31}"/>
+                <a16:creationId xmlns:a16="http://schemas.microsoft.com/office/drawing/2014/main" id="{B5C76D97-1025-4FBC-8EF7-A1C6716BB4EC}"/>
               </a:ext>
             </a:extLst>
           </p:cNvPr>
@@ -6939,7 +6939,7 @@
           <p:cNvPr id="4" name="">
             <a:extLst xmlns:a="http://schemas.openxmlformats.org/drawingml/2006/main">
               <a:ext uri="{FF2B5EF4-FFF2-40B4-BE49-F238E27FC236}">
-                <a16:creationId xmlns:a16="http://schemas.microsoft.com/office/drawing/2014/main" id="{BE31F2FA-BE8B-4BBF-96A6-55554BA0A1D5}"/>
+                <a16:creationId xmlns:a16="http://schemas.microsoft.com/office/drawing/2014/main" id="{091C166D-1549-48D7-83C2-523064EE2D64}"/>
               </a:ext>
             </a:extLst>
           </p:cNvPr>
@@ -6996,7 +6996,7 @@
           <p:cNvPr id="5" name="">
             <a:extLst xmlns:a="http://schemas.openxmlformats.org/drawingml/2006/main">
               <a:ext uri="{FF2B5EF4-FFF2-40B4-BE49-F238E27FC236}">
-                <a16:creationId xmlns:a16="http://schemas.microsoft.com/office/drawing/2014/main" id="{A942BC31-D161-4298-B69E-76F92D6F704C}"/>
+                <a16:creationId xmlns:a16="http://schemas.microsoft.com/office/drawing/2014/main" id="{E329908A-D33C-4122-89E7-CD844BF90519}"/>
               </a:ext>
             </a:extLst>
           </p:cNvPr>
@@ -7053,7 +7053,7 @@
           <p:cNvPr id="6" name="">
             <a:extLst xmlns:a="http://schemas.openxmlformats.org/drawingml/2006/main">
               <a:ext uri="{FF2B5EF4-FFF2-40B4-BE49-F238E27FC236}">
-                <a16:creationId xmlns:a16="http://schemas.microsoft.com/office/drawing/2014/main" id="{AE1D926A-28C1-4DA3-8DED-FE263777C441}"/>
+                <a16:creationId xmlns:a16="http://schemas.microsoft.com/office/drawing/2014/main" id="{3087FB7A-B583-486F-8720-BEB54912A6E8}"/>
               </a:ext>
             </a:extLst>
           </p:cNvPr>
@@ -7110,7 +7110,7 @@
           <p:cNvPr id="7" name="">
             <a:extLst xmlns:a="http://schemas.openxmlformats.org/drawingml/2006/main">
               <a:ext uri="{FF2B5EF4-FFF2-40B4-BE49-F238E27FC236}">
-                <a16:creationId xmlns:a16="http://schemas.microsoft.com/office/drawing/2014/main" id="{EA62BFAE-7AA3-48C8-A2DD-ADB48B5BC522}"/>
+                <a16:creationId xmlns:a16="http://schemas.microsoft.com/office/drawing/2014/main" id="{C0B11C5C-3326-4133-A0EC-CA58239066DB}"/>
               </a:ext>
             </a:extLst>
           </p:cNvPr>
@@ -7142,7 +7142,7 @@
           <p:cNvPr id="8" name="">
             <a:extLst xmlns:a="http://schemas.openxmlformats.org/drawingml/2006/main">
               <a:ext uri="{FF2B5EF4-FFF2-40B4-BE49-F238E27FC236}">
-                <a16:creationId xmlns:a16="http://schemas.microsoft.com/office/drawing/2014/main" id="{84EF3E13-ECF9-44BD-A761-F5DE17062E1F}"/>
+                <a16:creationId xmlns:a16="http://schemas.microsoft.com/office/drawing/2014/main" id="{8EE8E313-F2BC-4C74-A7AA-32B8E8C60D20}"/>
               </a:ext>
             </a:extLst>
           </p:cNvPr>
@@ -7199,7 +7199,7 @@
           <p:cNvPr id="9" name="">
             <a:extLst xmlns:a="http://schemas.openxmlformats.org/drawingml/2006/main">
               <a:ext uri="{FF2B5EF4-FFF2-40B4-BE49-F238E27FC236}">
-                <a16:creationId xmlns:a16="http://schemas.microsoft.com/office/drawing/2014/main" id="{4F26C853-C185-43A6-AF6A-416A2A7648AA}"/>
+                <a16:creationId xmlns:a16="http://schemas.microsoft.com/office/drawing/2014/main" id="{3A099EBA-21DD-4618-A972-710D5A286F9F}"/>
               </a:ext>
             </a:extLst>
           </p:cNvPr>
@@ -7256,7 +7256,7 @@
           <p:cNvPr id="10" name="">
             <a:extLst xmlns:a="http://schemas.openxmlformats.org/drawingml/2006/main">
               <a:ext uri="{FF2B5EF4-FFF2-40B4-BE49-F238E27FC236}">
-                <a16:creationId xmlns:a16="http://schemas.microsoft.com/office/drawing/2014/main" id="{A38EA243-A0E4-4BC4-9E3A-C26233762380}"/>
+                <a16:creationId xmlns:a16="http://schemas.microsoft.com/office/drawing/2014/main" id="{67ABDD88-DE95-40AD-A659-37FD7895198B}"/>
               </a:ext>
             </a:extLst>
           </p:cNvPr>
@@ -7313,7 +7313,7 @@
           <p:cNvPr id="11" name="">
             <a:extLst xmlns:a="http://schemas.openxmlformats.org/drawingml/2006/main">
               <a:ext uri="{FF2B5EF4-FFF2-40B4-BE49-F238E27FC236}">
-                <a16:creationId xmlns:a16="http://schemas.microsoft.com/office/drawing/2014/main" id="{F59607DA-B8EB-409E-B6D2-E4E9C57CCC30}"/>
+                <a16:creationId xmlns:a16="http://schemas.microsoft.com/office/drawing/2014/main" id="{CDB68139-D3D2-448B-A53B-F155BECC1E55}"/>
               </a:ext>
             </a:extLst>
           </p:cNvPr>
@@ -7345,7 +7345,7 @@
           <p:cNvPr id="12" name="">
             <a:extLst xmlns:a="http://schemas.openxmlformats.org/drawingml/2006/main">
               <a:ext uri="{FF2B5EF4-FFF2-40B4-BE49-F238E27FC236}">
-                <a16:creationId xmlns:a16="http://schemas.microsoft.com/office/drawing/2014/main" id="{2F1A745E-89F2-43B3-A0B1-A4CC60506045}"/>
+                <a16:creationId xmlns:a16="http://schemas.microsoft.com/office/drawing/2014/main" id="{2DC7304B-AFCC-4D7B-AA08-E603FADEF0F8}"/>
               </a:ext>
             </a:extLst>
           </p:cNvPr>
@@ -7402,7 +7402,7 @@
           <p:cNvPr id="13" name="">
             <a:extLst xmlns:a="http://schemas.openxmlformats.org/drawingml/2006/main">
               <a:ext uri="{FF2B5EF4-FFF2-40B4-BE49-F238E27FC236}">
-                <a16:creationId xmlns:a16="http://schemas.microsoft.com/office/drawing/2014/main" id="{55BC4BE1-A10C-4513-A77C-C3050D8E04F5}"/>
+                <a16:creationId xmlns:a16="http://schemas.microsoft.com/office/drawing/2014/main" id="{15DEF2D0-FD55-4CF2-A796-4FA74A2EAE6A}"/>
               </a:ext>
             </a:extLst>
           </p:cNvPr>
@@ -7459,7 +7459,7 @@
           <p:cNvPr id="14" name="">
             <a:extLst xmlns:a="http://schemas.openxmlformats.org/drawingml/2006/main">
               <a:ext uri="{FF2B5EF4-FFF2-40B4-BE49-F238E27FC236}">
-                <a16:creationId xmlns:a16="http://schemas.microsoft.com/office/drawing/2014/main" id="{BD721FBE-A338-438A-8AC4-C538D8482794}"/>
+                <a16:creationId xmlns:a16="http://schemas.microsoft.com/office/drawing/2014/main" id="{20D0D0F6-6FA5-49E7-9674-237723A140E7}"/>
               </a:ext>
             </a:extLst>
           </p:cNvPr>
@@ -7516,7 +7516,7 @@
           <p:cNvPr id="15" name="">
             <a:extLst xmlns:a="http://schemas.openxmlformats.org/drawingml/2006/main">
               <a:ext uri="{FF2B5EF4-FFF2-40B4-BE49-F238E27FC236}">
-                <a16:creationId xmlns:a16="http://schemas.microsoft.com/office/drawing/2014/main" id="{1D656215-95A4-4594-A2B8-8033E63ADB07}"/>
+                <a16:creationId xmlns:a16="http://schemas.microsoft.com/office/drawing/2014/main" id="{001395EB-07A4-47C8-B92F-2ADE3D325456}"/>
               </a:ext>
             </a:extLst>
           </p:cNvPr>
@@ -7571,7 +7571,7 @@
     </p:spTree>
     <p:extLst>
       <p:ext uri="{BB962C8B-B14F-4D97-AF65-F5344CB8AC3E}">
-        <p14:creationId xmlns:p14="http://schemas.microsoft.com/office/powerpoint/2010/main" val="1948321217"/>
+        <p14:creationId xmlns:p14="http://schemas.microsoft.com/office/powerpoint/2010/main" val="725955721"/>
       </p:ext>
     </p:extLst>
   </p:cSld>
@@ -7769,10 +7769,10 @@
       </p:grpSpPr>
       <p:sp>
         <p:nvSpPr>
-          <p:cNvPr id="23" name="">
-            <a:extLst xmlns:a="http://schemas.openxmlformats.org/drawingml/2006/main">
-              <a:ext uri="{FF2B5EF4-FFF2-40B4-BE49-F238E27FC236}">
-                <a16:creationId xmlns:a16="http://schemas.microsoft.com/office/drawing/2014/main" id="{02C13C4B-0436-40EE-96AF-267FD86DA9CF}"/>
+          <p:cNvPr id="26" name="">
+            <a:extLst xmlns:a="http://schemas.openxmlformats.org/drawingml/2006/main">
+              <a:ext uri="{FF2B5EF4-FFF2-40B4-BE49-F238E27FC236}">
+                <a16:creationId xmlns:a16="http://schemas.microsoft.com/office/drawing/2014/main" id="{BFFAB3D4-A13E-4C04-8FEE-633FDBCFC880}"/>
               </a:ext>
             </a:extLst>
           </p:cNvPr>
@@ -7804,7 +7804,7 @@
           <p:cNvPr id="2" name="">
             <a:extLst xmlns:a="http://schemas.openxmlformats.org/drawingml/2006/main">
               <a:ext uri="{FF2B5EF4-FFF2-40B4-BE49-F238E27FC236}">
-                <a16:creationId xmlns:a16="http://schemas.microsoft.com/office/drawing/2014/main" id="{1B59BEF7-E4F4-4416-8463-47AC8F54E4DC}"/>
+                <a16:creationId xmlns:a16="http://schemas.microsoft.com/office/drawing/2014/main" id="{10EA6AE8-2974-4434-B4C6-B82D9E5F92FB}"/>
               </a:ext>
             </a:extLst>
           </p:cNvPr>
@@ -7861,7 +7861,7 @@
           <p:cNvPr id="3" name="">
             <a:extLst xmlns:a="http://schemas.openxmlformats.org/drawingml/2006/main">
               <a:ext uri="{FF2B5EF4-FFF2-40B4-BE49-F238E27FC236}">
-                <a16:creationId xmlns:a16="http://schemas.microsoft.com/office/drawing/2014/main" id="{A2756E17-6B19-4A28-B18F-F571196B7EF3}"/>
+                <a16:creationId xmlns:a16="http://schemas.microsoft.com/office/drawing/2014/main" id="{8D9CD6C5-8199-4E93-B6D3-917CFC450E5B}"/>
               </a:ext>
             </a:extLst>
           </p:cNvPr>
@@ -7893,7 +7893,7 @@
           <p:cNvPr id="4" name="">
             <a:extLst xmlns:a="http://schemas.openxmlformats.org/drawingml/2006/main">
               <a:ext uri="{FF2B5EF4-FFF2-40B4-BE49-F238E27FC236}">
-                <a16:creationId xmlns:a16="http://schemas.microsoft.com/office/drawing/2014/main" id="{7788ADDD-17BF-4221-A8A0-8B4D61A25E2A}"/>
+                <a16:creationId xmlns:a16="http://schemas.microsoft.com/office/drawing/2014/main" id="{888C730C-5298-4551-B60D-AB02991C302C}"/>
               </a:ext>
             </a:extLst>
           </p:cNvPr>
@@ -7950,7 +7950,7 @@
           <p:cNvPr id="5" name="">
             <a:extLst xmlns:a="http://schemas.openxmlformats.org/drawingml/2006/main">
               <a:ext uri="{FF2B5EF4-FFF2-40B4-BE49-F238E27FC236}">
-                <a16:creationId xmlns:a16="http://schemas.microsoft.com/office/drawing/2014/main" id="{94908823-5F06-4C96-A7AF-C28F022ABD8F}"/>
+                <a16:creationId xmlns:a16="http://schemas.microsoft.com/office/drawing/2014/main" id="{49FA5E55-4E56-45AD-A968-18E8A514C6E9}"/>
               </a:ext>
             </a:extLst>
           </p:cNvPr>
@@ -8007,7 +8007,7 @@
           <p:cNvPr id="6" name="">
             <a:extLst xmlns:a="http://schemas.openxmlformats.org/drawingml/2006/main">
               <a:ext uri="{FF2B5EF4-FFF2-40B4-BE49-F238E27FC236}">
-                <a16:creationId xmlns:a16="http://schemas.microsoft.com/office/drawing/2014/main" id="{E62F35F1-D7B8-4AD4-B346-0972F09EB69C}"/>
+                <a16:creationId xmlns:a16="http://schemas.microsoft.com/office/drawing/2014/main" id="{6EF7990D-08F9-4CF6-8ECA-273FB69DD5CD}"/>
               </a:ext>
             </a:extLst>
           </p:cNvPr>
@@ -8064,7 +8064,7 @@
           <p:cNvPr id="7" name="">
             <a:extLst xmlns:a="http://schemas.openxmlformats.org/drawingml/2006/main">
               <a:ext uri="{FF2B5EF4-FFF2-40B4-BE49-F238E27FC236}">
-                <a16:creationId xmlns:a16="http://schemas.microsoft.com/office/drawing/2014/main" id="{BE0A05D6-F679-4979-9CED-EB61F7240F8A}"/>
+                <a16:creationId xmlns:a16="http://schemas.microsoft.com/office/drawing/2014/main" id="{AA866CAB-FD69-4B17-A69B-983442560871}"/>
               </a:ext>
             </a:extLst>
           </p:cNvPr>
@@ -8096,7 +8096,7 @@
           <p:cNvPr id="8" name="">
             <a:extLst xmlns:a="http://schemas.openxmlformats.org/drawingml/2006/main">
               <a:ext uri="{FF2B5EF4-FFF2-40B4-BE49-F238E27FC236}">
-                <a16:creationId xmlns:a16="http://schemas.microsoft.com/office/drawing/2014/main" id="{C3EEFA09-8595-472B-921C-A421AB9C326F}"/>
+                <a16:creationId xmlns:a16="http://schemas.microsoft.com/office/drawing/2014/main" id="{DE7EB01A-D780-4D4B-B7A1-F583CBE6396F}"/>
               </a:ext>
             </a:extLst>
           </p:cNvPr>
@@ -8153,7 +8153,7 @@
           <p:cNvPr id="9" name="">
             <a:extLst xmlns:a="http://schemas.openxmlformats.org/drawingml/2006/main">
               <a:ext uri="{FF2B5EF4-FFF2-40B4-BE49-F238E27FC236}">
-                <a16:creationId xmlns:a16="http://schemas.microsoft.com/office/drawing/2014/main" id="{144C11DC-1275-4D33-BF5D-E72F5A0A093D}"/>
+                <a16:creationId xmlns:a16="http://schemas.microsoft.com/office/drawing/2014/main" id="{E584097D-07C0-4916-9869-BDA64ED70993}"/>
               </a:ext>
             </a:extLst>
           </p:cNvPr>
@@ -8210,19 +8210,19 @@
           <p:cNvPr id="10" name="">
             <a:extLst xmlns:a="http://schemas.openxmlformats.org/drawingml/2006/main">
               <a:ext uri="{FF2B5EF4-FFF2-40B4-BE49-F238E27FC236}">
-                <a16:creationId xmlns:a16="http://schemas.microsoft.com/office/drawing/2014/main" id="{6C375328-6E6E-4391-AB6D-E780344EC7F8}"/>
-              </a:ext>
-            </a:extLst>
-          </p:cNvPr>
-          <p:cNvSpPr>
-            <a:spLocks xmlns:a="http://schemas.openxmlformats.org/drawingml/2006/main" noGrp="1"/>
-          </p:cNvSpPr>
-          <p:nvPr/>
-        </p:nvSpPr>
-        <p:spPr>
-          <a:xfrm xmlns:a="http://schemas.openxmlformats.org/drawingml/2006/main">
-            <a:off x="914400" y="1257300"/>
-            <a:ext cx="10363200" cy="781050"/>
+                <a16:creationId xmlns:a16="http://schemas.microsoft.com/office/drawing/2014/main" id="{61F4A9B6-9E73-4FF6-896D-B59ECB5B71FC}"/>
+              </a:ext>
+            </a:extLst>
+          </p:cNvPr>
+          <p:cNvSpPr>
+            <a:spLocks xmlns:a="http://schemas.openxmlformats.org/drawingml/2006/main" noGrp="1"/>
+          </p:cNvSpPr>
+          <p:nvPr/>
+        </p:nvSpPr>
+        <p:spPr>
+          <a:xfrm xmlns:a="http://schemas.openxmlformats.org/drawingml/2006/main">
+            <a:off x="857250" y="1219200"/>
+            <a:ext cx="10477500" cy="742950"/>
           </a:xfrm>
           <a:prstGeom xmlns:a="http://schemas.openxmlformats.org/drawingml/2006/main" prst="rect">
             <a:avLst/>
@@ -8239,7 +8239,7 @@
           <a:lstStyle xmlns:a="http://schemas.openxmlformats.org/drawingml/2006/main"/>
           <a:p xmlns:a="http://schemas.openxmlformats.org/drawingml/2006/main">
             <a:pPr algn="ctr">
-              <a:defRPr sz="2175" b="1">
+              <a:defRPr sz="2100" b="1">
                 <a:solidFill>
                   <a:srgbClr val="17253A"/>
                 </a:solidFill>
@@ -8249,7 +8249,7 @@
               </a:defRPr>
             </a:pPr>
             <a:r>
-              <a:rPr sz="2175" b="1">
+              <a:rPr sz="2100" b="1">
                 <a:solidFill>
                   <a:srgbClr val="17253A"/>
                 </a:solidFill>
@@ -8267,28 +8267,30 @@
           <p:cNvPr id="11" name="">
             <a:extLst xmlns:a="http://schemas.openxmlformats.org/drawingml/2006/main">
               <a:ext uri="{FF2B5EF4-FFF2-40B4-BE49-F238E27FC236}">
-                <a16:creationId xmlns:a16="http://schemas.microsoft.com/office/drawing/2014/main" id="{5AB47A28-DA7C-4520-A306-ABA154BB739C}"/>
-              </a:ext>
-            </a:extLst>
-          </p:cNvPr>
-          <p:cNvSpPr>
-            <a:spLocks xmlns:a="http://schemas.openxmlformats.org/drawingml/2006/main" noGrp="1"/>
-          </p:cNvSpPr>
-          <p:nvPr/>
-        </p:nvSpPr>
-        <p:spPr>
-          <a:xfrm xmlns:a="http://schemas.openxmlformats.org/drawingml/2006/main">
-            <a:off x="1000125" y="2247900"/>
-            <a:ext cx="476250" cy="476250"/>
-          </a:xfrm>
-          <a:prstGeom xmlns:a="http://schemas.openxmlformats.org/drawingml/2006/main" prst="ellipse">
+                <a16:creationId xmlns:a16="http://schemas.microsoft.com/office/drawing/2014/main" id="{86E8E41C-D021-4FFD-88E4-9984D244D62D}"/>
+              </a:ext>
+            </a:extLst>
+          </p:cNvPr>
+          <p:cNvSpPr>
+            <a:spLocks xmlns:a="http://schemas.openxmlformats.org/drawingml/2006/main" noGrp="1"/>
+          </p:cNvSpPr>
+          <p:nvPr/>
+        </p:nvSpPr>
+        <p:spPr>
+          <a:xfrm xmlns:a="http://schemas.openxmlformats.org/drawingml/2006/main">
+            <a:off x="971550" y="2124075"/>
+            <a:ext cx="38100" cy="3524250"/>
+          </a:xfrm>
+          <a:prstGeom xmlns:a="http://schemas.openxmlformats.org/drawingml/2006/main" prst="rect">
             <a:avLst/>
           </a:prstGeom>
           <a:solidFill xmlns:a="http://schemas.openxmlformats.org/drawingml/2006/main">
-            <a:srgbClr val="18324A"/>
+            <a:srgbClr val="2C6E73"/>
           </a:solidFill>
           <a:ln xmlns:a="http://schemas.openxmlformats.org/drawingml/2006/main" w="0">
-            <a:noFill/>
+            <a:solidFill>
+              <a:srgbClr val="2C6E73"/>
+            </a:solidFill>
           </a:ln>
         </p:spPr>
       </p:sp>
@@ -8297,19 +8299,19 @@
           <p:cNvPr id="12" name="">
             <a:extLst xmlns:a="http://schemas.openxmlformats.org/drawingml/2006/main">
               <a:ext uri="{FF2B5EF4-FFF2-40B4-BE49-F238E27FC236}">
-                <a16:creationId xmlns:a16="http://schemas.microsoft.com/office/drawing/2014/main" id="{832EA1ED-9FF0-4EEC-9887-AB888A0AA2B6}"/>
-              </a:ext>
-            </a:extLst>
-          </p:cNvPr>
-          <p:cNvSpPr>
-            <a:spLocks xmlns:a="http://schemas.openxmlformats.org/drawingml/2006/main" noGrp="1"/>
-          </p:cNvSpPr>
-          <p:nvPr/>
-        </p:nvSpPr>
-        <p:spPr>
-          <a:xfrm xmlns:a="http://schemas.openxmlformats.org/drawingml/2006/main">
-            <a:off x="1000125" y="2276475"/>
-            <a:ext cx="476250" cy="419100"/>
+                <a16:creationId xmlns:a16="http://schemas.microsoft.com/office/drawing/2014/main" id="{873602B0-5E65-400C-805F-82D509EB2C80}"/>
+              </a:ext>
+            </a:extLst>
+          </p:cNvPr>
+          <p:cNvSpPr>
+            <a:spLocks xmlns:a="http://schemas.openxmlformats.org/drawingml/2006/main" noGrp="1"/>
+          </p:cNvSpPr>
+          <p:nvPr/>
+        </p:nvSpPr>
+        <p:spPr>
+          <a:xfrm xmlns:a="http://schemas.openxmlformats.org/drawingml/2006/main">
+            <a:off x="1162050" y="2200275"/>
+            <a:ext cx="400050" cy="400050"/>
           </a:xfrm>
           <a:prstGeom xmlns:a="http://schemas.openxmlformats.org/drawingml/2006/main" prst="rect">
             <a:avLst/>
@@ -8326,9 +8328,9 @@
           <a:lstStyle xmlns:a="http://schemas.openxmlformats.org/drawingml/2006/main"/>
           <a:p xmlns:a="http://schemas.openxmlformats.org/drawingml/2006/main">
             <a:pPr algn="ctr">
-              <a:defRPr sz="1350" b="1">
-                <a:solidFill>
-                  <a:srgbClr val="FFFFFF"/>
+              <a:defRPr sz="1125" b="1">
+                <a:solidFill>
+                  <a:srgbClr val="2C6E73"/>
                 </a:solidFill>
                 <a:latin typeface="Arial"/>
                 <a:ea typeface="Arial"/>
@@ -8336,9 +8338,9 @@
               </a:defRPr>
             </a:pPr>
             <a:r>
-              <a:rPr sz="1350" b="1">
-                <a:solidFill>
-                  <a:srgbClr val="FFFFFF"/>
+              <a:rPr sz="1125" b="1">
+                <a:solidFill>
+                  <a:srgbClr val="2C6E73"/>
                 </a:solidFill>
                 <a:latin typeface="Arial"/>
                 <a:ea typeface="Arial"/>
@@ -8354,19 +8356,19 @@
           <p:cNvPr id="13" name="">
             <a:extLst xmlns:a="http://schemas.openxmlformats.org/drawingml/2006/main">
               <a:ext uri="{FF2B5EF4-FFF2-40B4-BE49-F238E27FC236}">
-                <a16:creationId xmlns:a16="http://schemas.microsoft.com/office/drawing/2014/main" id="{CC36CFB3-C976-43E5-AE71-B83A143EAC21}"/>
-              </a:ext>
-            </a:extLst>
-          </p:cNvPr>
-          <p:cNvSpPr>
-            <a:spLocks xmlns:a="http://schemas.openxmlformats.org/drawingml/2006/main" noGrp="1"/>
-          </p:cNvSpPr>
-          <p:nvPr/>
-        </p:nvSpPr>
-        <p:spPr>
-          <a:xfrm xmlns:a="http://schemas.openxmlformats.org/drawingml/2006/main">
-            <a:off x="1714500" y="2181225"/>
-            <a:ext cx="9429750" cy="609600"/>
+                <a16:creationId xmlns:a16="http://schemas.microsoft.com/office/drawing/2014/main" id="{3BF88230-9AF1-4FF2-AD45-968F8EB83B7A}"/>
+              </a:ext>
+            </a:extLst>
+          </p:cNvPr>
+          <p:cNvSpPr>
+            <a:spLocks xmlns:a="http://schemas.openxmlformats.org/drawingml/2006/main" noGrp="1"/>
+          </p:cNvSpPr>
+          <p:nvPr/>
+        </p:nvSpPr>
+        <p:spPr>
+          <a:xfrm xmlns:a="http://schemas.openxmlformats.org/drawingml/2006/main">
+            <a:off x="1714500" y="2114550"/>
+            <a:ext cx="9525000" cy="638175"/>
           </a:xfrm>
           <a:prstGeom xmlns:a="http://schemas.openxmlformats.org/drawingml/2006/main" prst="rect">
             <a:avLst/>
@@ -8383,7 +8385,7 @@
           <a:lstStyle xmlns:a="http://schemas.openxmlformats.org/drawingml/2006/main"/>
           <a:p xmlns:a="http://schemas.openxmlformats.org/drawingml/2006/main">
             <a:pPr algn="l">
-              <a:defRPr sz="1500" b="0">
+              <a:defRPr sz="1575" b="0">
                 <a:solidFill>
                   <a:srgbClr val="17253A"/>
                 </a:solidFill>
@@ -8393,7 +8395,7 @@
               </a:defRPr>
             </a:pPr>
             <a:r>
-              <a:rPr sz="1500" b="0">
+              <a:rPr sz="1575" b="0">
                 <a:solidFill>
                   <a:srgbClr val="17253A"/>
                 </a:solidFill>
@@ -8401,7 +8403,7 @@
                 <a:ea typeface="Arial"/>
                 <a:cs typeface="Arial"/>
               </a:rPr>
-              <a:t>Identify the structure: Find a useful percentage such as 10%, 5% or 1%.</a:t>
+              <a:t>35% of 480</a:t>
             </a:r>
           </a:p>
         </p:txBody>
@@ -8411,28 +8413,30 @@
           <p:cNvPr id="14" name="">
             <a:extLst xmlns:a="http://schemas.openxmlformats.org/drawingml/2006/main">
               <a:ext uri="{FF2B5EF4-FFF2-40B4-BE49-F238E27FC236}">
-                <a16:creationId xmlns:a16="http://schemas.microsoft.com/office/drawing/2014/main" id="{444629AE-C40F-42E0-8A70-F5DC563912D1}"/>
-              </a:ext>
-            </a:extLst>
-          </p:cNvPr>
-          <p:cNvSpPr>
-            <a:spLocks xmlns:a="http://schemas.openxmlformats.org/drawingml/2006/main" noGrp="1"/>
-          </p:cNvSpPr>
-          <p:nvPr/>
-        </p:nvSpPr>
-        <p:spPr>
-          <a:xfrm xmlns:a="http://schemas.openxmlformats.org/drawingml/2006/main">
-            <a:off x="1000125" y="2990850"/>
-            <a:ext cx="476250" cy="476250"/>
-          </a:xfrm>
-          <a:prstGeom xmlns:a="http://schemas.openxmlformats.org/drawingml/2006/main" prst="ellipse">
+                <a16:creationId xmlns:a16="http://schemas.microsoft.com/office/drawing/2014/main" id="{C81F0ABB-AA44-44BA-B435-BF0B509B7710}"/>
+              </a:ext>
+            </a:extLst>
+          </p:cNvPr>
+          <p:cNvSpPr>
+            <a:spLocks xmlns:a="http://schemas.openxmlformats.org/drawingml/2006/main" noGrp="1"/>
+          </p:cNvSpPr>
+          <p:nvPr/>
+        </p:nvSpPr>
+        <p:spPr>
+          <a:xfrm xmlns:a="http://schemas.openxmlformats.org/drawingml/2006/main">
+            <a:off x="1714500" y="2771775"/>
+            <a:ext cx="9334500" cy="9525"/>
+          </a:xfrm>
+          <a:prstGeom xmlns:a="http://schemas.openxmlformats.org/drawingml/2006/main" prst="rect">
             <a:avLst/>
           </a:prstGeom>
           <a:solidFill xmlns:a="http://schemas.openxmlformats.org/drawingml/2006/main">
-            <a:srgbClr val="2C6E73"/>
+            <a:srgbClr val="D9E0E6"/>
           </a:solidFill>
           <a:ln xmlns:a="http://schemas.openxmlformats.org/drawingml/2006/main" w="0">
-            <a:noFill/>
+            <a:solidFill>
+              <a:srgbClr val="D9E0E6"/>
+            </a:solidFill>
           </a:ln>
         </p:spPr>
       </p:sp>
@@ -8441,19 +8445,19 @@
           <p:cNvPr id="15" name="">
             <a:extLst xmlns:a="http://schemas.openxmlformats.org/drawingml/2006/main">
               <a:ext uri="{FF2B5EF4-FFF2-40B4-BE49-F238E27FC236}">
-                <a16:creationId xmlns:a16="http://schemas.microsoft.com/office/drawing/2014/main" id="{3B5B4455-7CB9-4121-8A73-71AD2267B655}"/>
-              </a:ext>
-            </a:extLst>
-          </p:cNvPr>
-          <p:cNvSpPr>
-            <a:spLocks xmlns:a="http://schemas.openxmlformats.org/drawingml/2006/main" noGrp="1"/>
-          </p:cNvSpPr>
-          <p:nvPr/>
-        </p:nvSpPr>
-        <p:spPr>
-          <a:xfrm xmlns:a="http://schemas.openxmlformats.org/drawingml/2006/main">
-            <a:off x="1000125" y="3019425"/>
-            <a:ext cx="476250" cy="419100"/>
+                <a16:creationId xmlns:a16="http://schemas.microsoft.com/office/drawing/2014/main" id="{EB6656C5-C044-48D9-A2A6-A2ED28C0E7BF}"/>
+              </a:ext>
+            </a:extLst>
+          </p:cNvPr>
+          <p:cNvSpPr>
+            <a:spLocks xmlns:a="http://schemas.openxmlformats.org/drawingml/2006/main" noGrp="1"/>
+          </p:cNvSpPr>
+          <p:nvPr/>
+        </p:nvSpPr>
+        <p:spPr>
+          <a:xfrm xmlns:a="http://schemas.openxmlformats.org/drawingml/2006/main">
+            <a:off x="1162050" y="2905125"/>
+            <a:ext cx="400050" cy="400050"/>
           </a:xfrm>
           <a:prstGeom xmlns:a="http://schemas.openxmlformats.org/drawingml/2006/main" prst="rect">
             <a:avLst/>
@@ -8470,9 +8474,9 @@
           <a:lstStyle xmlns:a="http://schemas.openxmlformats.org/drawingml/2006/main"/>
           <a:p xmlns:a="http://schemas.openxmlformats.org/drawingml/2006/main">
             <a:pPr algn="ctr">
-              <a:defRPr sz="1350" b="1">
-                <a:solidFill>
-                  <a:srgbClr val="FFFFFF"/>
+              <a:defRPr sz="1125" b="1">
+                <a:solidFill>
+                  <a:srgbClr val="2C6E73"/>
                 </a:solidFill>
                 <a:latin typeface="Arial"/>
                 <a:ea typeface="Arial"/>
@@ -8480,9 +8484,9 @@
               </a:defRPr>
             </a:pPr>
             <a:r>
-              <a:rPr sz="1350" b="1">
-                <a:solidFill>
-                  <a:srgbClr val="FFFFFF"/>
+              <a:rPr sz="1125" b="1">
+                <a:solidFill>
+                  <a:srgbClr val="2C6E73"/>
                 </a:solidFill>
                 <a:latin typeface="Arial"/>
                 <a:ea typeface="Arial"/>
@@ -8498,19 +8502,19 @@
           <p:cNvPr id="16" name="">
             <a:extLst xmlns:a="http://schemas.openxmlformats.org/drawingml/2006/main">
               <a:ext uri="{FF2B5EF4-FFF2-40B4-BE49-F238E27FC236}">
-                <a16:creationId xmlns:a16="http://schemas.microsoft.com/office/drawing/2014/main" id="{6EBFAEF3-6B1D-42C8-B997-DDCD99F62F9B}"/>
-              </a:ext>
-            </a:extLst>
-          </p:cNvPr>
-          <p:cNvSpPr>
-            <a:spLocks xmlns:a="http://schemas.openxmlformats.org/drawingml/2006/main" noGrp="1"/>
-          </p:cNvSpPr>
-          <p:nvPr/>
-        </p:nvSpPr>
-        <p:spPr>
-          <a:xfrm xmlns:a="http://schemas.openxmlformats.org/drawingml/2006/main">
-            <a:off x="1714500" y="2924175"/>
-            <a:ext cx="9429750" cy="609600"/>
+                <a16:creationId xmlns:a16="http://schemas.microsoft.com/office/drawing/2014/main" id="{1CF7DF1A-0245-4936-BF27-8B585CB09554}"/>
+              </a:ext>
+            </a:extLst>
+          </p:cNvPr>
+          <p:cNvSpPr>
+            <a:spLocks xmlns:a="http://schemas.openxmlformats.org/drawingml/2006/main" noGrp="1"/>
+          </p:cNvSpPr>
+          <p:nvPr/>
+        </p:nvSpPr>
+        <p:spPr>
+          <a:xfrm xmlns:a="http://schemas.openxmlformats.org/drawingml/2006/main">
+            <a:off x="1714500" y="2819400"/>
+            <a:ext cx="9525000" cy="638175"/>
           </a:xfrm>
           <a:prstGeom xmlns:a="http://schemas.openxmlformats.org/drawingml/2006/main" prst="rect">
             <a:avLst/>
@@ -8527,7 +8531,7 @@
           <a:lstStyle xmlns:a="http://schemas.openxmlformats.org/drawingml/2006/main"/>
           <a:p xmlns:a="http://schemas.openxmlformats.org/drawingml/2006/main">
             <a:pPr algn="l">
-              <a:defRPr sz="1500" b="0">
+              <a:defRPr sz="1575" b="0">
                 <a:solidFill>
                   <a:srgbClr val="17253A"/>
                 </a:solidFill>
@@ -8537,7 +8541,7 @@
               </a:defRPr>
             </a:pPr>
             <a:r>
-              <a:rPr sz="1500" b="0">
+              <a:rPr sz="1575" b="0">
                 <a:solidFill>
                   <a:srgbClr val="17253A"/>
                 </a:solidFill>
@@ -8545,7 +8549,7 @@
                 <a:ea typeface="Arial"/>
                 <a:cs typeface="Arial"/>
               </a:rPr>
-              <a:t>Set up the method: Combine or scale the known percentage to reach the required value.</a:t>
+              <a:t>10% = 48</a:t>
             </a:r>
           </a:p>
         </p:txBody>
@@ -8555,28 +8559,30 @@
           <p:cNvPr id="17" name="">
             <a:extLst xmlns:a="http://schemas.openxmlformats.org/drawingml/2006/main">
               <a:ext uri="{FF2B5EF4-FFF2-40B4-BE49-F238E27FC236}">
-                <a16:creationId xmlns:a16="http://schemas.microsoft.com/office/drawing/2014/main" id="{E4E1984C-7D3C-4C90-ACFC-4B6B3D8FCFA4}"/>
-              </a:ext>
-            </a:extLst>
-          </p:cNvPr>
-          <p:cNvSpPr>
-            <a:spLocks xmlns:a="http://schemas.openxmlformats.org/drawingml/2006/main" noGrp="1"/>
-          </p:cNvSpPr>
-          <p:nvPr/>
-        </p:nvSpPr>
-        <p:spPr>
-          <a:xfrm xmlns:a="http://schemas.openxmlformats.org/drawingml/2006/main">
-            <a:off x="1000125" y="3733800"/>
-            <a:ext cx="476250" cy="476250"/>
-          </a:xfrm>
-          <a:prstGeom xmlns:a="http://schemas.openxmlformats.org/drawingml/2006/main" prst="ellipse">
+                <a16:creationId xmlns:a16="http://schemas.microsoft.com/office/drawing/2014/main" id="{65CFCCA8-E7A7-434D-91B5-76458FD2C4BE}"/>
+              </a:ext>
+            </a:extLst>
+          </p:cNvPr>
+          <p:cNvSpPr>
+            <a:spLocks xmlns:a="http://schemas.openxmlformats.org/drawingml/2006/main" noGrp="1"/>
+          </p:cNvSpPr>
+          <p:nvPr/>
+        </p:nvSpPr>
+        <p:spPr>
+          <a:xfrm xmlns:a="http://schemas.openxmlformats.org/drawingml/2006/main">
+            <a:off x="1714500" y="3476625"/>
+            <a:ext cx="9334500" cy="9525"/>
+          </a:xfrm>
+          <a:prstGeom xmlns:a="http://schemas.openxmlformats.org/drawingml/2006/main" prst="rect">
             <a:avLst/>
           </a:prstGeom>
           <a:solidFill xmlns:a="http://schemas.openxmlformats.org/drawingml/2006/main">
-            <a:srgbClr val="2C6E73"/>
+            <a:srgbClr val="D9E0E6"/>
           </a:solidFill>
           <a:ln xmlns:a="http://schemas.openxmlformats.org/drawingml/2006/main" w="0">
-            <a:noFill/>
+            <a:solidFill>
+              <a:srgbClr val="D9E0E6"/>
+            </a:solidFill>
           </a:ln>
         </p:spPr>
       </p:sp>
@@ -8585,19 +8591,19 @@
           <p:cNvPr id="18" name="">
             <a:extLst xmlns:a="http://schemas.openxmlformats.org/drawingml/2006/main">
               <a:ext uri="{FF2B5EF4-FFF2-40B4-BE49-F238E27FC236}">
-                <a16:creationId xmlns:a16="http://schemas.microsoft.com/office/drawing/2014/main" id="{1D0ABC72-5000-49B3-A709-B742AB7B2FEB}"/>
-              </a:ext>
-            </a:extLst>
-          </p:cNvPr>
-          <p:cNvSpPr>
-            <a:spLocks xmlns:a="http://schemas.openxmlformats.org/drawingml/2006/main" noGrp="1"/>
-          </p:cNvSpPr>
-          <p:nvPr/>
-        </p:nvSpPr>
-        <p:spPr>
-          <a:xfrm xmlns:a="http://schemas.openxmlformats.org/drawingml/2006/main">
-            <a:off x="1000125" y="3762375"/>
-            <a:ext cx="476250" cy="419100"/>
+                <a16:creationId xmlns:a16="http://schemas.microsoft.com/office/drawing/2014/main" id="{2A461073-A701-40DB-8B5D-7471E80911CE}"/>
+              </a:ext>
+            </a:extLst>
+          </p:cNvPr>
+          <p:cNvSpPr>
+            <a:spLocks xmlns:a="http://schemas.openxmlformats.org/drawingml/2006/main" noGrp="1"/>
+          </p:cNvSpPr>
+          <p:nvPr/>
+        </p:nvSpPr>
+        <p:spPr>
+          <a:xfrm xmlns:a="http://schemas.openxmlformats.org/drawingml/2006/main">
+            <a:off x="1162050" y="3609975"/>
+            <a:ext cx="400050" cy="400050"/>
           </a:xfrm>
           <a:prstGeom xmlns:a="http://schemas.openxmlformats.org/drawingml/2006/main" prst="rect">
             <a:avLst/>
@@ -8614,9 +8620,9 @@
           <a:lstStyle xmlns:a="http://schemas.openxmlformats.org/drawingml/2006/main"/>
           <a:p xmlns:a="http://schemas.openxmlformats.org/drawingml/2006/main">
             <a:pPr algn="ctr">
-              <a:defRPr sz="1350" b="1">
-                <a:solidFill>
-                  <a:srgbClr val="FFFFFF"/>
+              <a:defRPr sz="1125" b="1">
+                <a:solidFill>
+                  <a:srgbClr val="2C6E73"/>
                 </a:solidFill>
                 <a:latin typeface="Arial"/>
                 <a:ea typeface="Arial"/>
@@ -8624,9 +8630,9 @@
               </a:defRPr>
             </a:pPr>
             <a:r>
-              <a:rPr sz="1350" b="1">
-                <a:solidFill>
-                  <a:srgbClr val="FFFFFF"/>
+              <a:rPr sz="1125" b="1">
+                <a:solidFill>
+                  <a:srgbClr val="2C6E73"/>
                 </a:solidFill>
                 <a:latin typeface="Arial"/>
                 <a:ea typeface="Arial"/>
@@ -8642,19 +8648,19 @@
           <p:cNvPr id="19" name="">
             <a:extLst xmlns:a="http://schemas.openxmlformats.org/drawingml/2006/main">
               <a:ext uri="{FF2B5EF4-FFF2-40B4-BE49-F238E27FC236}">
-                <a16:creationId xmlns:a16="http://schemas.microsoft.com/office/drawing/2014/main" id="{06803E8D-D224-43F5-B152-4C4AB120381E}"/>
-              </a:ext>
-            </a:extLst>
-          </p:cNvPr>
-          <p:cNvSpPr>
-            <a:spLocks xmlns:a="http://schemas.openxmlformats.org/drawingml/2006/main" noGrp="1"/>
-          </p:cNvSpPr>
-          <p:nvPr/>
-        </p:nvSpPr>
-        <p:spPr>
-          <a:xfrm xmlns:a="http://schemas.openxmlformats.org/drawingml/2006/main">
-            <a:off x="1714500" y="3667125"/>
-            <a:ext cx="9429750" cy="609600"/>
+                <a16:creationId xmlns:a16="http://schemas.microsoft.com/office/drawing/2014/main" id="{458F5D88-099F-4B41-87D4-54B33B7F6778}"/>
+              </a:ext>
+            </a:extLst>
+          </p:cNvPr>
+          <p:cNvSpPr>
+            <a:spLocks xmlns:a="http://schemas.openxmlformats.org/drawingml/2006/main" noGrp="1"/>
+          </p:cNvSpPr>
+          <p:nvPr/>
+        </p:nvSpPr>
+        <p:spPr>
+          <a:xfrm xmlns:a="http://schemas.openxmlformats.org/drawingml/2006/main">
+            <a:off x="1714500" y="3524250"/>
+            <a:ext cx="9525000" cy="638175"/>
           </a:xfrm>
           <a:prstGeom xmlns:a="http://schemas.openxmlformats.org/drawingml/2006/main" prst="rect">
             <a:avLst/>
@@ -8671,7 +8677,7 @@
           <a:lstStyle xmlns:a="http://schemas.openxmlformats.org/drawingml/2006/main"/>
           <a:p xmlns:a="http://schemas.openxmlformats.org/drawingml/2006/main">
             <a:pPr algn="l">
-              <a:defRPr sz="1500" b="0">
+              <a:defRPr sz="1575" b="0">
                 <a:solidFill>
                   <a:srgbClr val="17253A"/>
                 </a:solidFill>
@@ -8681,7 +8687,7 @@
               </a:defRPr>
             </a:pPr>
             <a:r>
-              <a:rPr sz="1500" b="0">
+              <a:rPr sz="1575" b="0">
                 <a:solidFill>
                   <a:srgbClr val="17253A"/>
                 </a:solidFill>
@@ -8689,7 +8695,7 @@
                 <a:ea typeface="Arial"/>
                 <a:cs typeface="Arial"/>
               </a:rPr>
-              <a:t>Complete the calculation: 168.</a:t>
+              <a:t>30% = 144     5% = 24</a:t>
             </a:r>
           </a:p>
         </p:txBody>
@@ -8699,28 +8705,30 @@
           <p:cNvPr id="20" name="">
             <a:extLst xmlns:a="http://schemas.openxmlformats.org/drawingml/2006/main">
               <a:ext uri="{FF2B5EF4-FFF2-40B4-BE49-F238E27FC236}">
-                <a16:creationId xmlns:a16="http://schemas.microsoft.com/office/drawing/2014/main" id="{76BD4660-424D-4E58-93E3-EB9F9D320BB5}"/>
-              </a:ext>
-            </a:extLst>
-          </p:cNvPr>
-          <p:cNvSpPr>
-            <a:spLocks xmlns:a="http://schemas.openxmlformats.org/drawingml/2006/main" noGrp="1"/>
-          </p:cNvSpPr>
-          <p:nvPr/>
-        </p:nvSpPr>
-        <p:spPr>
-          <a:xfrm xmlns:a="http://schemas.openxmlformats.org/drawingml/2006/main">
-            <a:off x="1000125" y="4476750"/>
-            <a:ext cx="476250" cy="476250"/>
-          </a:xfrm>
-          <a:prstGeom xmlns:a="http://schemas.openxmlformats.org/drawingml/2006/main" prst="ellipse">
+                <a16:creationId xmlns:a16="http://schemas.microsoft.com/office/drawing/2014/main" id="{75932F07-5B60-44E4-82A3-9B42FEB868B1}"/>
+              </a:ext>
+            </a:extLst>
+          </p:cNvPr>
+          <p:cNvSpPr>
+            <a:spLocks xmlns:a="http://schemas.openxmlformats.org/drawingml/2006/main" noGrp="1"/>
+          </p:cNvSpPr>
+          <p:nvPr/>
+        </p:nvSpPr>
+        <p:spPr>
+          <a:xfrm xmlns:a="http://schemas.openxmlformats.org/drawingml/2006/main">
+            <a:off x="1714500" y="4181475"/>
+            <a:ext cx="9334500" cy="9525"/>
+          </a:xfrm>
+          <a:prstGeom xmlns:a="http://schemas.openxmlformats.org/drawingml/2006/main" prst="rect">
             <a:avLst/>
           </a:prstGeom>
           <a:solidFill xmlns:a="http://schemas.openxmlformats.org/drawingml/2006/main">
-            <a:srgbClr val="2C6E73"/>
+            <a:srgbClr val="D9E0E6"/>
           </a:solidFill>
           <a:ln xmlns:a="http://schemas.openxmlformats.org/drawingml/2006/main" w="0">
-            <a:noFill/>
+            <a:solidFill>
+              <a:srgbClr val="D9E0E6"/>
+            </a:solidFill>
           </a:ln>
         </p:spPr>
       </p:sp>
@@ -8729,19 +8737,19 @@
           <p:cNvPr id="21" name="">
             <a:extLst xmlns:a="http://schemas.openxmlformats.org/drawingml/2006/main">
               <a:ext uri="{FF2B5EF4-FFF2-40B4-BE49-F238E27FC236}">
-                <a16:creationId xmlns:a16="http://schemas.microsoft.com/office/drawing/2014/main" id="{B23DDFB7-977E-4744-83C3-C0BB79AAF00E}"/>
-              </a:ext>
-            </a:extLst>
-          </p:cNvPr>
-          <p:cNvSpPr>
-            <a:spLocks xmlns:a="http://schemas.openxmlformats.org/drawingml/2006/main" noGrp="1"/>
-          </p:cNvSpPr>
-          <p:nvPr/>
-        </p:nvSpPr>
-        <p:spPr>
-          <a:xfrm xmlns:a="http://schemas.openxmlformats.org/drawingml/2006/main">
-            <a:off x="1000125" y="4505325"/>
-            <a:ext cx="476250" cy="419100"/>
+                <a16:creationId xmlns:a16="http://schemas.microsoft.com/office/drawing/2014/main" id="{75AA2542-1A6F-40B8-BDB0-553470119FF4}"/>
+              </a:ext>
+            </a:extLst>
+          </p:cNvPr>
+          <p:cNvSpPr>
+            <a:spLocks xmlns:a="http://schemas.openxmlformats.org/drawingml/2006/main" noGrp="1"/>
+          </p:cNvSpPr>
+          <p:nvPr/>
+        </p:nvSpPr>
+        <p:spPr>
+          <a:xfrm xmlns:a="http://schemas.openxmlformats.org/drawingml/2006/main">
+            <a:off x="1162050" y="4314825"/>
+            <a:ext cx="400050" cy="400050"/>
           </a:xfrm>
           <a:prstGeom xmlns:a="http://schemas.openxmlformats.org/drawingml/2006/main" prst="rect">
             <a:avLst/>
@@ -8758,9 +8766,9 @@
           <a:lstStyle xmlns:a="http://schemas.openxmlformats.org/drawingml/2006/main"/>
           <a:p xmlns:a="http://schemas.openxmlformats.org/drawingml/2006/main">
             <a:pPr algn="ctr">
-              <a:defRPr sz="1350" b="1">
-                <a:solidFill>
-                  <a:srgbClr val="FFFFFF"/>
+              <a:defRPr sz="1125" b="1">
+                <a:solidFill>
+                  <a:srgbClr val="2C6E73"/>
                 </a:solidFill>
                 <a:latin typeface="Arial"/>
                 <a:ea typeface="Arial"/>
@@ -8768,9 +8776,9 @@
               </a:defRPr>
             </a:pPr>
             <a:r>
-              <a:rPr sz="1350" b="1">
-                <a:solidFill>
-                  <a:srgbClr val="FFFFFF"/>
+              <a:rPr sz="1125" b="1">
+                <a:solidFill>
+                  <a:srgbClr val="2C6E73"/>
                 </a:solidFill>
                 <a:latin typeface="Arial"/>
                 <a:ea typeface="Arial"/>
@@ -8786,19 +8794,19 @@
           <p:cNvPr id="22" name="">
             <a:extLst xmlns:a="http://schemas.openxmlformats.org/drawingml/2006/main">
               <a:ext uri="{FF2B5EF4-FFF2-40B4-BE49-F238E27FC236}">
-                <a16:creationId xmlns:a16="http://schemas.microsoft.com/office/drawing/2014/main" id="{8851EFCA-2509-4B06-8581-C32A57DE912D}"/>
-              </a:ext>
-            </a:extLst>
-          </p:cNvPr>
-          <p:cNvSpPr>
-            <a:spLocks xmlns:a="http://schemas.openxmlformats.org/drawingml/2006/main" noGrp="1"/>
-          </p:cNvSpPr>
-          <p:nvPr/>
-        </p:nvSpPr>
-        <p:spPr>
-          <a:xfrm xmlns:a="http://schemas.openxmlformats.org/drawingml/2006/main">
-            <a:off x="1714500" y="4410075"/>
-            <a:ext cx="9429750" cy="609600"/>
+                <a16:creationId xmlns:a16="http://schemas.microsoft.com/office/drawing/2014/main" id="{04974DDE-D060-4A35-88F8-A2CFA472F91C}"/>
+              </a:ext>
+            </a:extLst>
+          </p:cNvPr>
+          <p:cNvSpPr>
+            <a:spLocks xmlns:a="http://schemas.openxmlformats.org/drawingml/2006/main" noGrp="1"/>
+          </p:cNvSpPr>
+          <p:nvPr/>
+        </p:nvSpPr>
+        <p:spPr>
+          <a:xfrm xmlns:a="http://schemas.openxmlformats.org/drawingml/2006/main">
+            <a:off x="1714500" y="4229100"/>
+            <a:ext cx="9525000" cy="638175"/>
           </a:xfrm>
           <a:prstGeom xmlns:a="http://schemas.openxmlformats.org/drawingml/2006/main" prst="rect">
             <a:avLst/>
@@ -8815,9 +8823,9 @@
           <a:lstStyle xmlns:a="http://schemas.openxmlformats.org/drawingml/2006/main"/>
           <a:p xmlns:a="http://schemas.openxmlformats.org/drawingml/2006/main">
             <a:pPr algn="l">
-              <a:defRPr sz="1500" b="1">
-                <a:solidFill>
-                  <a:srgbClr val="2F785D"/>
+              <a:defRPr sz="1575" b="0">
+                <a:solidFill>
+                  <a:srgbClr val="17253A"/>
                 </a:solidFill>
                 <a:latin typeface="Arial"/>
                 <a:ea typeface="Arial"/>
@@ -8825,15 +8833,161 @@
               </a:defRPr>
             </a:pPr>
             <a:r>
-              <a:rPr sz="1500" b="1">
+              <a:rPr sz="1575" b="0">
+                <a:solidFill>
+                  <a:srgbClr val="17253A"/>
+                </a:solidFill>
+                <a:latin typeface="Arial"/>
+                <a:ea typeface="Arial"/>
+                <a:cs typeface="Arial"/>
+              </a:rPr>
+              <a:t>144 + 24</a:t>
+            </a:r>
+          </a:p>
+        </p:txBody>
+      </p:sp>
+      <p:sp>
+        <p:nvSpPr>
+          <p:cNvPr id="23" name="">
+            <a:extLst xmlns:a="http://schemas.openxmlformats.org/drawingml/2006/main">
+              <a:ext uri="{FF2B5EF4-FFF2-40B4-BE49-F238E27FC236}">
+                <a16:creationId xmlns:a16="http://schemas.microsoft.com/office/drawing/2014/main" id="{93F187A5-4FA7-4114-A3B9-A602ECE9F110}"/>
+              </a:ext>
+            </a:extLst>
+          </p:cNvPr>
+          <p:cNvSpPr>
+            <a:spLocks xmlns:a="http://schemas.openxmlformats.org/drawingml/2006/main" noGrp="1"/>
+          </p:cNvSpPr>
+          <p:nvPr/>
+        </p:nvSpPr>
+        <p:spPr>
+          <a:xfrm xmlns:a="http://schemas.openxmlformats.org/drawingml/2006/main">
+            <a:off x="1714500" y="4886325"/>
+            <a:ext cx="9334500" cy="9525"/>
+          </a:xfrm>
+          <a:prstGeom xmlns:a="http://schemas.openxmlformats.org/drawingml/2006/main" prst="rect">
+            <a:avLst/>
+          </a:prstGeom>
+          <a:solidFill xmlns:a="http://schemas.openxmlformats.org/drawingml/2006/main">
+            <a:srgbClr val="D9E0E6"/>
+          </a:solidFill>
+          <a:ln xmlns:a="http://schemas.openxmlformats.org/drawingml/2006/main" w="0">
+            <a:solidFill>
+              <a:srgbClr val="D9E0E6"/>
+            </a:solidFill>
+          </a:ln>
+        </p:spPr>
+      </p:sp>
+      <p:sp>
+        <p:nvSpPr>
+          <p:cNvPr id="24" name="">
+            <a:extLst xmlns:a="http://schemas.openxmlformats.org/drawingml/2006/main">
+              <a:ext uri="{FF2B5EF4-FFF2-40B4-BE49-F238E27FC236}">
+                <a16:creationId xmlns:a16="http://schemas.microsoft.com/office/drawing/2014/main" id="{CF07795B-094E-4B3E-8701-A8745D233285}"/>
+              </a:ext>
+            </a:extLst>
+          </p:cNvPr>
+          <p:cNvSpPr>
+            <a:spLocks xmlns:a="http://schemas.openxmlformats.org/drawingml/2006/main" noGrp="1"/>
+          </p:cNvSpPr>
+          <p:nvPr/>
+        </p:nvSpPr>
+        <p:spPr>
+          <a:xfrm xmlns:a="http://schemas.openxmlformats.org/drawingml/2006/main">
+            <a:off x="1162050" y="5019675"/>
+            <a:ext cx="400050" cy="400050"/>
+          </a:xfrm>
+          <a:prstGeom xmlns:a="http://schemas.openxmlformats.org/drawingml/2006/main" prst="rect">
+            <a:avLst/>
+          </a:prstGeom>
+          <a:noFill xmlns:a="http://schemas.openxmlformats.org/drawingml/2006/main"/>
+          <a:ln xmlns:a="http://schemas.openxmlformats.org/drawingml/2006/main" w="0">
+            <a:noFill/>
+          </a:ln>
+        </p:spPr>
+        <p:txBody>
+          <a:bodyPr xmlns:a="http://schemas.openxmlformats.org/drawingml/2006/main" anchor="ctr">
+            <a:normAutofit fontScale="100000"/>
+          </a:bodyPr>
+          <a:lstStyle xmlns:a="http://schemas.openxmlformats.org/drawingml/2006/main"/>
+          <a:p xmlns:a="http://schemas.openxmlformats.org/drawingml/2006/main">
+            <a:pPr algn="ctr">
+              <a:defRPr sz="1125" b="1">
                 <a:solidFill>
                   <a:srgbClr val="2F785D"/>
                 </a:solidFill>
                 <a:latin typeface="Arial"/>
                 <a:ea typeface="Arial"/>
                 <a:cs typeface="Arial"/>
+              </a:defRPr>
+            </a:pPr>
+            <a:r>
+              <a:rPr sz="1125" b="1">
+                <a:solidFill>
+                  <a:srgbClr val="2F785D"/>
+                </a:solidFill>
+                <a:latin typeface="Arial"/>
+                <a:ea typeface="Arial"/>
+                <a:cs typeface="Arial"/>
               </a:rPr>
-              <a:t>Check the result: Check the result against the whole amount and context.</a:t>
+              <a:t>5</a:t>
+            </a:r>
+          </a:p>
+        </p:txBody>
+      </p:sp>
+      <p:sp>
+        <p:nvSpPr>
+          <p:cNvPr id="25" name="">
+            <a:extLst xmlns:a="http://schemas.openxmlformats.org/drawingml/2006/main">
+              <a:ext uri="{FF2B5EF4-FFF2-40B4-BE49-F238E27FC236}">
+                <a16:creationId xmlns:a16="http://schemas.microsoft.com/office/drawing/2014/main" id="{A04C9C83-93B3-47B3-AB30-3A6FF4F77BB1}"/>
+              </a:ext>
+            </a:extLst>
+          </p:cNvPr>
+          <p:cNvSpPr>
+            <a:spLocks xmlns:a="http://schemas.openxmlformats.org/drawingml/2006/main" noGrp="1"/>
+          </p:cNvSpPr>
+          <p:nvPr/>
+        </p:nvSpPr>
+        <p:spPr>
+          <a:xfrm xmlns:a="http://schemas.openxmlformats.org/drawingml/2006/main">
+            <a:off x="1714500" y="4933950"/>
+            <a:ext cx="9525000" cy="638175"/>
+          </a:xfrm>
+          <a:prstGeom xmlns:a="http://schemas.openxmlformats.org/drawingml/2006/main" prst="rect">
+            <a:avLst/>
+          </a:prstGeom>
+          <a:noFill xmlns:a="http://schemas.openxmlformats.org/drawingml/2006/main"/>
+          <a:ln xmlns:a="http://schemas.openxmlformats.org/drawingml/2006/main" w="0">
+            <a:noFill/>
+          </a:ln>
+        </p:spPr>
+        <p:txBody>
+          <a:bodyPr xmlns:a="http://schemas.openxmlformats.org/drawingml/2006/main" anchor="ctr">
+            <a:normAutofit fontScale="100000"/>
+          </a:bodyPr>
+          <a:lstStyle xmlns:a="http://schemas.openxmlformats.org/drawingml/2006/main"/>
+          <a:p xmlns:a="http://schemas.openxmlformats.org/drawingml/2006/main">
+            <a:pPr algn="l">
+              <a:defRPr sz="1575" b="1">
+                <a:solidFill>
+                  <a:srgbClr val="2F785D"/>
+                </a:solidFill>
+                <a:latin typeface="Arial"/>
+                <a:ea typeface="Arial"/>
+                <a:cs typeface="Arial"/>
+              </a:defRPr>
+            </a:pPr>
+            <a:r>
+              <a:rPr sz="1575" b="1">
+                <a:solidFill>
+                  <a:srgbClr val="2F785D"/>
+                </a:solidFill>
+                <a:latin typeface="Arial"/>
+                <a:ea typeface="Arial"/>
+                <a:cs typeface="Arial"/>
+              </a:rPr>
+              <a:t>168</a:t>
             </a:r>
           </a:p>
         </p:txBody>
@@ -8841,7 +8995,7 @@
     </p:spTree>
     <p:extLst>
       <p:ext uri="{BB962C8B-B14F-4D97-AF65-F5344CB8AC3E}">
-        <p14:creationId xmlns:p14="http://schemas.microsoft.com/office/powerpoint/2010/main" val="197199491"/>
+        <p14:creationId xmlns:p14="http://schemas.microsoft.com/office/powerpoint/2010/main" val="601211310"/>
       </p:ext>
     </p:extLst>
   </p:cSld>
@@ -9078,6 +9232,51 @@
                       </p:childTnLst>
                     </p:cTn>
                   </p:par>
+                  <p:par>
+                    <p:cTn id="23" fill="hold">
+                      <p:stCondLst>
+                        <p:cond delay="indefinite"/>
+                      </p:stCondLst>
+                      <p:childTnLst>
+                        <p:par>
+                          <p:cTn id="24" fill="hold">
+                            <p:stCondLst>
+                              <p:cond delay="0"/>
+                            </p:stCondLst>
+                            <p:childTnLst>
+                              <p:par>
+                                <p:cTn id="25" presetID="1" presetClass="entr" presetSubtype="0" fill="hold" grpId="0" nodeType="clickEffect">
+                                  <p:stCondLst>
+                                    <p:cond delay="0"/>
+                                  </p:stCondLst>
+                                  <p:childTnLst>
+                                    <p:set>
+                                      <p:cBhvr>
+                                        <p:cTn id="26" dur="1" fill="hold">
+                                          <p:stCondLst>
+                                            <p:cond delay="0"/>
+                                          </p:stCondLst>
+                                        </p:cTn>
+                                        <p:tgtEl>
+                                          <p:spTgt spid="25"/>
+                                        </p:tgtEl>
+                                        <p:attrNameLst>
+                                          <p:attrName>style.visibility</p:attrName>
+                                        </p:attrNameLst>
+                                      </p:cBhvr>
+                                      <p:to>
+                                        <p:strVal val="visible"/>
+                                      </p:to>
+                                    </p:set>
+                                  </p:childTnLst>
+                                </p:cTn>
+                              </p:par>
+                            </p:childTnLst>
+                          </p:cTn>
+                        </p:par>
+                      </p:childTnLst>
+                    </p:cTn>
+                  </p:par>
                 </p:childTnLst>
               </p:cTn>
               <p:prevCondLst>
@@ -9105,6 +9304,7 @@
       <p:bldP spid="16" grpId="0"/>
       <p:bldP spid="19" grpId="0"/>
       <p:bldP spid="22" grpId="0"/>
+      <p:bldP spid="25" grpId="0"/>
     </p:bldLst>
   </p:timing>
 </p:sld>
@@ -9134,7 +9334,7 @@
           <p:cNvPr id="15" name="">
             <a:extLst xmlns:a="http://schemas.openxmlformats.org/drawingml/2006/main">
               <a:ext uri="{FF2B5EF4-FFF2-40B4-BE49-F238E27FC236}">
-                <a16:creationId xmlns:a16="http://schemas.microsoft.com/office/drawing/2014/main" id="{97DFFEC3-3C89-4DEE-B23A-AA8032B8898D}"/>
+                <a16:creationId xmlns:a16="http://schemas.microsoft.com/office/drawing/2014/main" id="{0651B92F-1FF3-45BC-BF64-733F6A34F4F9}"/>
               </a:ext>
             </a:extLst>
           </p:cNvPr>
@@ -9166,7 +9366,7 @@
           <p:cNvPr id="2" name="">
             <a:extLst xmlns:a="http://schemas.openxmlformats.org/drawingml/2006/main">
               <a:ext uri="{FF2B5EF4-FFF2-40B4-BE49-F238E27FC236}">
-                <a16:creationId xmlns:a16="http://schemas.microsoft.com/office/drawing/2014/main" id="{A9A2EBC4-1D4D-453A-BF82-75DC20AD6669}"/>
+                <a16:creationId xmlns:a16="http://schemas.microsoft.com/office/drawing/2014/main" id="{24510061-2867-4A82-9FA9-A43D4A951676}"/>
               </a:ext>
             </a:extLst>
           </p:cNvPr>
@@ -9223,7 +9423,7 @@
           <p:cNvPr id="3" name="">
             <a:extLst xmlns:a="http://schemas.openxmlformats.org/drawingml/2006/main">
               <a:ext uri="{FF2B5EF4-FFF2-40B4-BE49-F238E27FC236}">
-                <a16:creationId xmlns:a16="http://schemas.microsoft.com/office/drawing/2014/main" id="{ECC6574C-DC87-4F50-B449-FD30690F25BC}"/>
+                <a16:creationId xmlns:a16="http://schemas.microsoft.com/office/drawing/2014/main" id="{EA3E8620-C8D5-44E0-8F0E-99BBC3D3548F}"/>
               </a:ext>
             </a:extLst>
           </p:cNvPr>
@@ -9255,7 +9455,7 @@
           <p:cNvPr id="4" name="">
             <a:extLst xmlns:a="http://schemas.openxmlformats.org/drawingml/2006/main">
               <a:ext uri="{FF2B5EF4-FFF2-40B4-BE49-F238E27FC236}">
-                <a16:creationId xmlns:a16="http://schemas.microsoft.com/office/drawing/2014/main" id="{E4119C01-186E-450D-8B4C-E0ED6430581F}"/>
+                <a16:creationId xmlns:a16="http://schemas.microsoft.com/office/drawing/2014/main" id="{72A9A15E-7A89-43C7-B636-67EA061ACAB5}"/>
               </a:ext>
             </a:extLst>
           </p:cNvPr>
@@ -9312,7 +9512,7 @@
           <p:cNvPr id="5" name="">
             <a:extLst xmlns:a="http://schemas.openxmlformats.org/drawingml/2006/main">
               <a:ext uri="{FF2B5EF4-FFF2-40B4-BE49-F238E27FC236}">
-                <a16:creationId xmlns:a16="http://schemas.microsoft.com/office/drawing/2014/main" id="{EC01B6F8-35AB-4C58-A1F9-586A97322E2B}"/>
+                <a16:creationId xmlns:a16="http://schemas.microsoft.com/office/drawing/2014/main" id="{55637047-7BDF-4507-8DDB-715238880C45}"/>
               </a:ext>
             </a:extLst>
           </p:cNvPr>
@@ -9369,7 +9569,7 @@
           <p:cNvPr id="6" name="">
             <a:extLst xmlns:a="http://schemas.openxmlformats.org/drawingml/2006/main">
               <a:ext uri="{FF2B5EF4-FFF2-40B4-BE49-F238E27FC236}">
-                <a16:creationId xmlns:a16="http://schemas.microsoft.com/office/drawing/2014/main" id="{25899B14-4917-4A50-A887-53961D5AC756}"/>
+                <a16:creationId xmlns:a16="http://schemas.microsoft.com/office/drawing/2014/main" id="{F3E0734E-C3F2-4452-9DF1-544EC06631B7}"/>
               </a:ext>
             </a:extLst>
           </p:cNvPr>
@@ -9426,7 +9626,7 @@
           <p:cNvPr id="7" name="">
             <a:extLst xmlns:a="http://schemas.openxmlformats.org/drawingml/2006/main">
               <a:ext uri="{FF2B5EF4-FFF2-40B4-BE49-F238E27FC236}">
-                <a16:creationId xmlns:a16="http://schemas.microsoft.com/office/drawing/2014/main" id="{CA565587-244D-4EC8-85BD-2DAA88A126A4}"/>
+                <a16:creationId xmlns:a16="http://schemas.microsoft.com/office/drawing/2014/main" id="{814A51F7-A59B-47CC-A3EA-7A6FEAE13DF3}"/>
               </a:ext>
             </a:extLst>
           </p:cNvPr>
@@ -9458,7 +9658,7 @@
           <p:cNvPr id="8" name="">
             <a:extLst xmlns:a="http://schemas.openxmlformats.org/drawingml/2006/main">
               <a:ext uri="{FF2B5EF4-FFF2-40B4-BE49-F238E27FC236}">
-                <a16:creationId xmlns:a16="http://schemas.microsoft.com/office/drawing/2014/main" id="{9123603F-3910-4D3E-9606-D092304547B3}"/>
+                <a16:creationId xmlns:a16="http://schemas.microsoft.com/office/drawing/2014/main" id="{C9A724DD-BF06-49D9-AC4E-034F89B07570}"/>
               </a:ext>
             </a:extLst>
           </p:cNvPr>
@@ -9515,7 +9715,7 @@
           <p:cNvPr id="9" name="">
             <a:extLst xmlns:a="http://schemas.openxmlformats.org/drawingml/2006/main">
               <a:ext uri="{FF2B5EF4-FFF2-40B4-BE49-F238E27FC236}">
-                <a16:creationId xmlns:a16="http://schemas.microsoft.com/office/drawing/2014/main" id="{59A0F533-53AD-475C-9900-A118F55E337A}"/>
+                <a16:creationId xmlns:a16="http://schemas.microsoft.com/office/drawing/2014/main" id="{3742F306-A1F3-4972-8576-5FE2627C08C6}"/>
               </a:ext>
             </a:extLst>
           </p:cNvPr>
@@ -9572,7 +9772,7 @@
           <p:cNvPr id="10" name="">
             <a:extLst xmlns:a="http://schemas.openxmlformats.org/drawingml/2006/main">
               <a:ext uri="{FF2B5EF4-FFF2-40B4-BE49-F238E27FC236}">
-                <a16:creationId xmlns:a16="http://schemas.microsoft.com/office/drawing/2014/main" id="{7FED7608-2DF8-41D1-9F9F-CD5684A7C13F}"/>
+                <a16:creationId xmlns:a16="http://schemas.microsoft.com/office/drawing/2014/main" id="{AABB5FE6-5CAE-44DA-9B1C-8607366DDC21}"/>
               </a:ext>
             </a:extLst>
           </p:cNvPr>
@@ -9629,7 +9829,7 @@
           <p:cNvPr id="11" name="">
             <a:extLst xmlns:a="http://schemas.openxmlformats.org/drawingml/2006/main">
               <a:ext uri="{FF2B5EF4-FFF2-40B4-BE49-F238E27FC236}">
-                <a16:creationId xmlns:a16="http://schemas.microsoft.com/office/drawing/2014/main" id="{0464E273-ED3A-43ED-8466-730AC0C5ADA5}"/>
+                <a16:creationId xmlns:a16="http://schemas.microsoft.com/office/drawing/2014/main" id="{F77242EB-67E4-41E7-9C64-657823A61B82}"/>
               </a:ext>
             </a:extLst>
           </p:cNvPr>
@@ -9686,7 +9886,7 @@
           <p:cNvPr id="12" name="">
             <a:extLst xmlns:a="http://schemas.openxmlformats.org/drawingml/2006/main">
               <a:ext uri="{FF2B5EF4-FFF2-40B4-BE49-F238E27FC236}">
-                <a16:creationId xmlns:a16="http://schemas.microsoft.com/office/drawing/2014/main" id="{2EE5AC6D-1F89-4AF1-994B-8735B3EA9335}"/>
+                <a16:creationId xmlns:a16="http://schemas.microsoft.com/office/drawing/2014/main" id="{90CE1E2A-2DC9-44BB-AA7B-904C16DE5205}"/>
               </a:ext>
             </a:extLst>
           </p:cNvPr>
@@ -9718,7 +9918,7 @@
           <p:cNvPr id="13" name="">
             <a:extLst xmlns:a="http://schemas.openxmlformats.org/drawingml/2006/main">
               <a:ext uri="{FF2B5EF4-FFF2-40B4-BE49-F238E27FC236}">
-                <a16:creationId xmlns:a16="http://schemas.microsoft.com/office/drawing/2014/main" id="{E508017A-DF59-4946-B8CE-B8FB65EFF102}"/>
+                <a16:creationId xmlns:a16="http://schemas.microsoft.com/office/drawing/2014/main" id="{E7D8DE95-F0A4-49EF-9BA5-095581B1CCDC}"/>
               </a:ext>
             </a:extLst>
           </p:cNvPr>
@@ -9775,7 +9975,7 @@
           <p:cNvPr id="14" name="">
             <a:extLst xmlns:a="http://schemas.openxmlformats.org/drawingml/2006/main">
               <a:ext uri="{FF2B5EF4-FFF2-40B4-BE49-F238E27FC236}">
-                <a16:creationId xmlns:a16="http://schemas.microsoft.com/office/drawing/2014/main" id="{EBFE6B29-2EC3-4406-BF49-DE25CAD4BB5D}"/>
+                <a16:creationId xmlns:a16="http://schemas.microsoft.com/office/drawing/2014/main" id="{8012EA21-6270-484A-AAE6-8DBCD1A15ABF}"/>
               </a:ext>
             </a:extLst>
           </p:cNvPr>
@@ -9830,7 +10030,7 @@
     </p:spTree>
     <p:extLst>
       <p:ext uri="{BB962C8B-B14F-4D97-AF65-F5344CB8AC3E}">
-        <p14:creationId xmlns:p14="http://schemas.microsoft.com/office/powerpoint/2010/main" val="209213415"/>
+        <p14:creationId xmlns:p14="http://schemas.microsoft.com/office/powerpoint/2010/main" val="289827379"/>
       </p:ext>
     </p:extLst>
   </p:cSld>
@@ -10031,7 +10231,7 @@
           <p:cNvPr id="16" name="">
             <a:extLst xmlns:a="http://schemas.openxmlformats.org/drawingml/2006/main">
               <a:ext uri="{FF2B5EF4-FFF2-40B4-BE49-F238E27FC236}">
-                <a16:creationId xmlns:a16="http://schemas.microsoft.com/office/drawing/2014/main" id="{83E75BF1-AF13-4D27-AB3F-2F0BE396CA1F}"/>
+                <a16:creationId xmlns:a16="http://schemas.microsoft.com/office/drawing/2014/main" id="{EC22611A-EE0D-4B61-A107-47220CB4A6F5}"/>
               </a:ext>
             </a:extLst>
           </p:cNvPr>
@@ -10063,7 +10263,7 @@
           <p:cNvPr id="2" name="">
             <a:extLst xmlns:a="http://schemas.openxmlformats.org/drawingml/2006/main">
               <a:ext uri="{FF2B5EF4-FFF2-40B4-BE49-F238E27FC236}">
-                <a16:creationId xmlns:a16="http://schemas.microsoft.com/office/drawing/2014/main" id="{90426169-DA29-4FB6-BD2A-2C305E4A96CA}"/>
+                <a16:creationId xmlns:a16="http://schemas.microsoft.com/office/drawing/2014/main" id="{10B4E7DF-BDFE-404C-B397-B5602F1EAD6B}"/>
               </a:ext>
             </a:extLst>
           </p:cNvPr>
@@ -10120,7 +10320,7 @@
           <p:cNvPr id="3" name="">
             <a:extLst xmlns:a="http://schemas.openxmlformats.org/drawingml/2006/main">
               <a:ext uri="{FF2B5EF4-FFF2-40B4-BE49-F238E27FC236}">
-                <a16:creationId xmlns:a16="http://schemas.microsoft.com/office/drawing/2014/main" id="{D965A27D-DF6A-47C3-83BF-61842024C7DA}"/>
+                <a16:creationId xmlns:a16="http://schemas.microsoft.com/office/drawing/2014/main" id="{23E15EDE-CC97-4824-8646-C11437B4B9F8}"/>
               </a:ext>
             </a:extLst>
           </p:cNvPr>
@@ -10152,7 +10352,7 @@
           <p:cNvPr id="4" name="">
             <a:extLst xmlns:a="http://schemas.openxmlformats.org/drawingml/2006/main">
               <a:ext uri="{FF2B5EF4-FFF2-40B4-BE49-F238E27FC236}">
-                <a16:creationId xmlns:a16="http://schemas.microsoft.com/office/drawing/2014/main" id="{43E82DB2-5129-46FB-8AB1-B24309CCA095}"/>
+                <a16:creationId xmlns:a16="http://schemas.microsoft.com/office/drawing/2014/main" id="{CBEB06AC-968C-4A41-8417-240BF28BA570}"/>
               </a:ext>
             </a:extLst>
           </p:cNvPr>
@@ -10209,7 +10409,7 @@
           <p:cNvPr id="5" name="">
             <a:extLst xmlns:a="http://schemas.openxmlformats.org/drawingml/2006/main">
               <a:ext uri="{FF2B5EF4-FFF2-40B4-BE49-F238E27FC236}">
-                <a16:creationId xmlns:a16="http://schemas.microsoft.com/office/drawing/2014/main" id="{E2B2EEB4-64C1-4C5D-B54F-4B70B9941ED5}"/>
+                <a16:creationId xmlns:a16="http://schemas.microsoft.com/office/drawing/2014/main" id="{27F47602-B4F1-410E-9AD5-904591AA17EB}"/>
               </a:ext>
             </a:extLst>
           </p:cNvPr>
@@ -10266,7 +10466,7 @@
           <p:cNvPr id="6" name="">
             <a:extLst xmlns:a="http://schemas.openxmlformats.org/drawingml/2006/main">
               <a:ext uri="{FF2B5EF4-FFF2-40B4-BE49-F238E27FC236}">
-                <a16:creationId xmlns:a16="http://schemas.microsoft.com/office/drawing/2014/main" id="{D27A6D7B-FA94-4100-9579-C08031292314}"/>
+                <a16:creationId xmlns:a16="http://schemas.microsoft.com/office/drawing/2014/main" id="{633F25CA-839C-431F-A1F7-3DBD4A7B199F}"/>
               </a:ext>
             </a:extLst>
           </p:cNvPr>
@@ -10323,7 +10523,7 @@
           <p:cNvPr id="7" name="">
             <a:extLst xmlns:a="http://schemas.openxmlformats.org/drawingml/2006/main">
               <a:ext uri="{FF2B5EF4-FFF2-40B4-BE49-F238E27FC236}">
-                <a16:creationId xmlns:a16="http://schemas.microsoft.com/office/drawing/2014/main" id="{60E8F1AA-1FB0-4B91-BCA3-DB4D1CB7E9B0}"/>
+                <a16:creationId xmlns:a16="http://schemas.microsoft.com/office/drawing/2014/main" id="{26EEA185-9109-43EC-AE16-772B056EB14A}"/>
               </a:ext>
             </a:extLst>
           </p:cNvPr>
@@ -10355,7 +10555,7 @@
           <p:cNvPr id="8" name="">
             <a:extLst xmlns:a="http://schemas.openxmlformats.org/drawingml/2006/main">
               <a:ext uri="{FF2B5EF4-FFF2-40B4-BE49-F238E27FC236}">
-                <a16:creationId xmlns:a16="http://schemas.microsoft.com/office/drawing/2014/main" id="{C71004AC-A962-4C42-B660-D0A6DEE7F5C0}"/>
+                <a16:creationId xmlns:a16="http://schemas.microsoft.com/office/drawing/2014/main" id="{347951A1-EEAE-4406-A5D4-9A15EF71AABE}"/>
               </a:ext>
             </a:extLst>
           </p:cNvPr>
@@ -10412,7 +10612,7 @@
           <p:cNvPr id="9" name="">
             <a:extLst xmlns:a="http://schemas.openxmlformats.org/drawingml/2006/main">
               <a:ext uri="{FF2B5EF4-FFF2-40B4-BE49-F238E27FC236}">
-                <a16:creationId xmlns:a16="http://schemas.microsoft.com/office/drawing/2014/main" id="{D0546017-33F9-4B19-9FD8-566BFDD9ED11}"/>
+                <a16:creationId xmlns:a16="http://schemas.microsoft.com/office/drawing/2014/main" id="{3314E7AD-9095-4C11-98E0-DEDC5633D994}"/>
               </a:ext>
             </a:extLst>
           </p:cNvPr>
@@ -10469,7 +10669,7 @@
           <p:cNvPr id="10" name="">
             <a:extLst xmlns:a="http://schemas.openxmlformats.org/drawingml/2006/main">
               <a:ext uri="{FF2B5EF4-FFF2-40B4-BE49-F238E27FC236}">
-                <a16:creationId xmlns:a16="http://schemas.microsoft.com/office/drawing/2014/main" id="{48A8E803-4D66-4108-A159-64EEBACB7E80}"/>
+                <a16:creationId xmlns:a16="http://schemas.microsoft.com/office/drawing/2014/main" id="{CF5E8C76-D299-4E7A-9036-5D5035DC46C4}"/>
               </a:ext>
             </a:extLst>
           </p:cNvPr>
@@ -10526,7 +10726,7 @@
           <p:cNvPr id="11" name="">
             <a:extLst xmlns:a="http://schemas.openxmlformats.org/drawingml/2006/main">
               <a:ext uri="{FF2B5EF4-FFF2-40B4-BE49-F238E27FC236}">
-                <a16:creationId xmlns:a16="http://schemas.microsoft.com/office/drawing/2014/main" id="{AF1F0348-E9B1-4968-AAE1-FFAD63AA1EFD}"/>
+                <a16:creationId xmlns:a16="http://schemas.microsoft.com/office/drawing/2014/main" id="{3B071F6C-2764-422A-8A96-FC987D992097}"/>
               </a:ext>
             </a:extLst>
           </p:cNvPr>
@@ -10583,7 +10783,7 @@
           <p:cNvPr id="12" name="">
             <a:extLst xmlns:a="http://schemas.openxmlformats.org/drawingml/2006/main">
               <a:ext uri="{FF2B5EF4-FFF2-40B4-BE49-F238E27FC236}">
-                <a16:creationId xmlns:a16="http://schemas.microsoft.com/office/drawing/2014/main" id="{60C9530E-1187-49F5-B04C-D2FF8D25B6A1}"/>
+                <a16:creationId xmlns:a16="http://schemas.microsoft.com/office/drawing/2014/main" id="{89C09ABE-5794-454E-9DF9-84D96A82C7AA}"/>
               </a:ext>
             </a:extLst>
           </p:cNvPr>
@@ -10640,7 +10840,7 @@
           <p:cNvPr id="13" name="">
             <a:extLst xmlns:a="http://schemas.openxmlformats.org/drawingml/2006/main">
               <a:ext uri="{FF2B5EF4-FFF2-40B4-BE49-F238E27FC236}">
-                <a16:creationId xmlns:a16="http://schemas.microsoft.com/office/drawing/2014/main" id="{BFF941B1-0A7F-4790-A9FA-710AFDFB928F}"/>
+                <a16:creationId xmlns:a16="http://schemas.microsoft.com/office/drawing/2014/main" id="{A7E76797-4755-42E2-BAB6-861FDA2D46C7}"/>
               </a:ext>
             </a:extLst>
           </p:cNvPr>
@@ -10697,7 +10897,7 @@
           <p:cNvPr id="14" name="">
             <a:extLst xmlns:a="http://schemas.openxmlformats.org/drawingml/2006/main">
               <a:ext uri="{FF2B5EF4-FFF2-40B4-BE49-F238E27FC236}">
-                <a16:creationId xmlns:a16="http://schemas.microsoft.com/office/drawing/2014/main" id="{6A74E59F-6220-4A7A-8A52-35F649F5CC62}"/>
+                <a16:creationId xmlns:a16="http://schemas.microsoft.com/office/drawing/2014/main" id="{9B1A36DC-2834-4A82-B9F9-2E923652F96B}"/>
               </a:ext>
             </a:extLst>
           </p:cNvPr>
@@ -10754,7 +10954,7 @@
           <p:cNvPr id="15" name="">
             <a:extLst xmlns:a="http://schemas.openxmlformats.org/drawingml/2006/main">
               <a:ext uri="{FF2B5EF4-FFF2-40B4-BE49-F238E27FC236}">
-                <a16:creationId xmlns:a16="http://schemas.microsoft.com/office/drawing/2014/main" id="{218F7C42-DBAD-4C3A-ACA9-7EE9A53CE2A7}"/>
+                <a16:creationId xmlns:a16="http://schemas.microsoft.com/office/drawing/2014/main" id="{4447C584-7A19-467C-87EC-E83F94A2A8B4}"/>
               </a:ext>
             </a:extLst>
           </p:cNvPr>
@@ -10809,7 +11009,7 @@
     </p:spTree>
     <p:extLst>
       <p:ext uri="{BB962C8B-B14F-4D97-AF65-F5344CB8AC3E}">
-        <p14:creationId xmlns:p14="http://schemas.microsoft.com/office/powerpoint/2010/main" val="2107391475"/>
+        <p14:creationId xmlns:p14="http://schemas.microsoft.com/office/powerpoint/2010/main" val="311971135"/>
       </p:ext>
     </p:extLst>
   </p:cSld>
@@ -10964,7 +11164,7 @@
           <p:cNvPr id="16" name="">
             <a:extLst xmlns:a="http://schemas.openxmlformats.org/drawingml/2006/main">
               <a:ext uri="{FF2B5EF4-FFF2-40B4-BE49-F238E27FC236}">
-                <a16:creationId xmlns:a16="http://schemas.microsoft.com/office/drawing/2014/main" id="{D1D5D626-20F5-4370-B47F-9DBFF87C1BE7}"/>
+                <a16:creationId xmlns:a16="http://schemas.microsoft.com/office/drawing/2014/main" id="{4C035CFC-1076-4553-BB9E-9F9F2E924C89}"/>
               </a:ext>
             </a:extLst>
           </p:cNvPr>
@@ -10996,7 +11196,7 @@
           <p:cNvPr id="2" name="">
             <a:extLst xmlns:a="http://schemas.openxmlformats.org/drawingml/2006/main">
               <a:ext uri="{FF2B5EF4-FFF2-40B4-BE49-F238E27FC236}">
-                <a16:creationId xmlns:a16="http://schemas.microsoft.com/office/drawing/2014/main" id="{86D2B47D-EFA0-4077-9D9E-96E01A2ED3B3}"/>
+                <a16:creationId xmlns:a16="http://schemas.microsoft.com/office/drawing/2014/main" id="{176545C7-35B8-4F52-8F07-1D966453AB5D}"/>
               </a:ext>
             </a:extLst>
           </p:cNvPr>
@@ -11053,7 +11253,7 @@
           <p:cNvPr id="3" name="">
             <a:extLst xmlns:a="http://schemas.openxmlformats.org/drawingml/2006/main">
               <a:ext uri="{FF2B5EF4-FFF2-40B4-BE49-F238E27FC236}">
-                <a16:creationId xmlns:a16="http://schemas.microsoft.com/office/drawing/2014/main" id="{9DD9828B-B8B4-4872-985E-DB601A737B96}"/>
+                <a16:creationId xmlns:a16="http://schemas.microsoft.com/office/drawing/2014/main" id="{CAAF532C-FDBD-409A-B83E-0599A75EA78F}"/>
               </a:ext>
             </a:extLst>
           </p:cNvPr>
@@ -11085,7 +11285,7 @@
           <p:cNvPr id="4" name="">
             <a:extLst xmlns:a="http://schemas.openxmlformats.org/drawingml/2006/main">
               <a:ext uri="{FF2B5EF4-FFF2-40B4-BE49-F238E27FC236}">
-                <a16:creationId xmlns:a16="http://schemas.microsoft.com/office/drawing/2014/main" id="{FBE8F513-DEF0-4AAD-ABDF-8B19FE3564FE}"/>
+                <a16:creationId xmlns:a16="http://schemas.microsoft.com/office/drawing/2014/main" id="{AE790238-BEC4-445C-9C35-E14008E389E8}"/>
               </a:ext>
             </a:extLst>
           </p:cNvPr>
@@ -11142,7 +11342,7 @@
           <p:cNvPr id="5" name="">
             <a:extLst xmlns:a="http://schemas.openxmlformats.org/drawingml/2006/main">
               <a:ext uri="{FF2B5EF4-FFF2-40B4-BE49-F238E27FC236}">
-                <a16:creationId xmlns:a16="http://schemas.microsoft.com/office/drawing/2014/main" id="{49CF1784-5326-4F67-B6FA-800C6E459ADD}"/>
+                <a16:creationId xmlns:a16="http://schemas.microsoft.com/office/drawing/2014/main" id="{143A7EB3-15EE-4D2D-AA26-2476E0F42D92}"/>
               </a:ext>
             </a:extLst>
           </p:cNvPr>
@@ -11199,7 +11399,7 @@
           <p:cNvPr id="6" name="">
             <a:extLst xmlns:a="http://schemas.openxmlformats.org/drawingml/2006/main">
               <a:ext uri="{FF2B5EF4-FFF2-40B4-BE49-F238E27FC236}">
-                <a16:creationId xmlns:a16="http://schemas.microsoft.com/office/drawing/2014/main" id="{67A99BDA-CB96-4F40-81C1-8DD575962AF9}"/>
+                <a16:creationId xmlns:a16="http://schemas.microsoft.com/office/drawing/2014/main" id="{B9472B8C-9E78-4CCC-A500-E3553BC0A519}"/>
               </a:ext>
             </a:extLst>
           </p:cNvPr>
@@ -11256,7 +11456,7 @@
           <p:cNvPr id="7" name="">
             <a:extLst xmlns:a="http://schemas.openxmlformats.org/drawingml/2006/main">
               <a:ext uri="{FF2B5EF4-FFF2-40B4-BE49-F238E27FC236}">
-                <a16:creationId xmlns:a16="http://schemas.microsoft.com/office/drawing/2014/main" id="{092C89BE-B698-4C98-8AD2-85C21450E91C}"/>
+                <a16:creationId xmlns:a16="http://schemas.microsoft.com/office/drawing/2014/main" id="{3D01DE68-A145-4856-B2AE-D412F480B8CE}"/>
               </a:ext>
             </a:extLst>
           </p:cNvPr>
@@ -11288,7 +11488,7 @@
           <p:cNvPr id="8" name="">
             <a:extLst xmlns:a="http://schemas.openxmlformats.org/drawingml/2006/main">
               <a:ext uri="{FF2B5EF4-FFF2-40B4-BE49-F238E27FC236}">
-                <a16:creationId xmlns:a16="http://schemas.microsoft.com/office/drawing/2014/main" id="{1EEC3B39-D32D-4117-AFCB-D651B4441CDE}"/>
+                <a16:creationId xmlns:a16="http://schemas.microsoft.com/office/drawing/2014/main" id="{E0301F34-E456-463C-AC79-3A6815072E85}"/>
               </a:ext>
             </a:extLst>
           </p:cNvPr>
@@ -11345,7 +11545,7 @@
           <p:cNvPr id="9" name="">
             <a:extLst xmlns:a="http://schemas.openxmlformats.org/drawingml/2006/main">
               <a:ext uri="{FF2B5EF4-FFF2-40B4-BE49-F238E27FC236}">
-                <a16:creationId xmlns:a16="http://schemas.microsoft.com/office/drawing/2014/main" id="{08EC1A03-A6DC-45A1-9C25-352F85B2E080}"/>
+                <a16:creationId xmlns:a16="http://schemas.microsoft.com/office/drawing/2014/main" id="{8CD573CE-810D-4832-89DD-93DC394DF81B}"/>
               </a:ext>
             </a:extLst>
           </p:cNvPr>
@@ -11406,7 +11606,7 @@
           <p:nvPr/>
         </p:nvPicPr>
         <p:blipFill>
-          <a:blip xmlns:r="http://schemas.openxmlformats.org/officeDocument/2006/relationships" xmlns:a="http://schemas.openxmlformats.org/drawingml/2006/main" r:embed="R381c450b9c374564"/>
+          <a:blip xmlns:r="http://schemas.openxmlformats.org/officeDocument/2006/relationships" xmlns:a="http://schemas.openxmlformats.org/drawingml/2006/main" r:embed="R62dd478403b64b47"/>
           <a:stretch xmlns:a="http://schemas.openxmlformats.org/drawingml/2006/main"/>
         </p:blipFill>
         <p:spPr>
@@ -11424,7 +11624,7 @@
           <p:cNvPr id="11" name="">
             <a:extLst xmlns:a="http://schemas.openxmlformats.org/drawingml/2006/main">
               <a:ext uri="{FF2B5EF4-FFF2-40B4-BE49-F238E27FC236}">
-                <a16:creationId xmlns:a16="http://schemas.microsoft.com/office/drawing/2014/main" id="{A11DB86E-5E69-4D05-8BDD-83DF1AE6EC6B}"/>
+                <a16:creationId xmlns:a16="http://schemas.microsoft.com/office/drawing/2014/main" id="{0702ADAA-9F62-4B0D-B2F7-4224E89F0852}"/>
               </a:ext>
             </a:extLst>
           </p:cNvPr>
@@ -11481,7 +11681,7 @@
           <p:cNvPr id="12" name="">
             <a:extLst xmlns:a="http://schemas.openxmlformats.org/drawingml/2006/main">
               <a:ext uri="{FF2B5EF4-FFF2-40B4-BE49-F238E27FC236}">
-                <a16:creationId xmlns:a16="http://schemas.microsoft.com/office/drawing/2014/main" id="{A4C364CD-A1DC-4D72-803D-37C238EE4D1D}"/>
+                <a16:creationId xmlns:a16="http://schemas.microsoft.com/office/drawing/2014/main" id="{9050420A-A926-4A9A-B4FE-63F1884DECE4}"/>
               </a:ext>
             </a:extLst>
           </p:cNvPr>
@@ -11538,7 +11738,7 @@
           <p:cNvPr id="13" name="">
             <a:extLst xmlns:a="http://schemas.openxmlformats.org/drawingml/2006/main">
               <a:ext uri="{FF2B5EF4-FFF2-40B4-BE49-F238E27FC236}">
-                <a16:creationId xmlns:a16="http://schemas.microsoft.com/office/drawing/2014/main" id="{545E5C82-ED29-4BF0-A2F1-1AA176425184}"/>
+                <a16:creationId xmlns:a16="http://schemas.microsoft.com/office/drawing/2014/main" id="{809F6A21-BD23-4B28-B6E8-D1EC0942B5AF}"/>
               </a:ext>
             </a:extLst>
           </p:cNvPr>
@@ -11570,7 +11770,7 @@
           <p:cNvPr id="14" name="">
             <a:extLst xmlns:a="http://schemas.openxmlformats.org/drawingml/2006/main">
               <a:ext uri="{FF2B5EF4-FFF2-40B4-BE49-F238E27FC236}">
-                <a16:creationId xmlns:a16="http://schemas.microsoft.com/office/drawing/2014/main" id="{A513FB9C-4E62-4CDF-A583-63D96D5098D1}"/>
+                <a16:creationId xmlns:a16="http://schemas.microsoft.com/office/drawing/2014/main" id="{71857B97-BEEB-48B6-863F-21C59333B761}"/>
               </a:ext>
             </a:extLst>
           </p:cNvPr>
@@ -11627,7 +11827,7 @@
           <p:cNvPr id="15" name="">
             <a:extLst xmlns:a="http://schemas.openxmlformats.org/drawingml/2006/main">
               <a:ext uri="{FF2B5EF4-FFF2-40B4-BE49-F238E27FC236}">
-                <a16:creationId xmlns:a16="http://schemas.microsoft.com/office/drawing/2014/main" id="{587EAC8B-BCCF-48AF-A4E7-36396C7B61A7}"/>
+                <a16:creationId xmlns:a16="http://schemas.microsoft.com/office/drawing/2014/main" id="{1FD8C4C7-7DC2-4029-BFDD-34661A57DFB2}"/>
               </a:ext>
             </a:extLst>
           </p:cNvPr>
@@ -11682,7 +11882,7 @@
     </p:spTree>
     <p:extLst>
       <p:ext uri="{BB962C8B-B14F-4D97-AF65-F5344CB8AC3E}">
-        <p14:creationId xmlns:p14="http://schemas.microsoft.com/office/powerpoint/2010/main" val="445230806"/>
+        <p14:creationId xmlns:p14="http://schemas.microsoft.com/office/powerpoint/2010/main" val="2020543990"/>
       </p:ext>
     </p:extLst>
   </p:cSld>
@@ -11837,7 +12037,7 @@
           <p:cNvPr id="23" name="">
             <a:extLst xmlns:a="http://schemas.openxmlformats.org/drawingml/2006/main">
               <a:ext uri="{FF2B5EF4-FFF2-40B4-BE49-F238E27FC236}">
-                <a16:creationId xmlns:a16="http://schemas.microsoft.com/office/drawing/2014/main" id="{86BF5D8D-4AA6-4055-98C1-DE82E297CA1D}"/>
+                <a16:creationId xmlns:a16="http://schemas.microsoft.com/office/drawing/2014/main" id="{7D53066D-8809-4B6A-A3CA-FDAF9D3A2AF2}"/>
               </a:ext>
             </a:extLst>
           </p:cNvPr>
@@ -11869,7 +12069,7 @@
           <p:cNvPr id="2" name="">
             <a:extLst xmlns:a="http://schemas.openxmlformats.org/drawingml/2006/main">
               <a:ext uri="{FF2B5EF4-FFF2-40B4-BE49-F238E27FC236}">
-                <a16:creationId xmlns:a16="http://schemas.microsoft.com/office/drawing/2014/main" id="{2FF5CAFD-A5E9-4283-BE44-BCE79492BAEB}"/>
+                <a16:creationId xmlns:a16="http://schemas.microsoft.com/office/drawing/2014/main" id="{C9ED93EA-BD83-4937-93EB-E786A359A00D}"/>
               </a:ext>
             </a:extLst>
           </p:cNvPr>
@@ -11926,7 +12126,7 @@
           <p:cNvPr id="3" name="">
             <a:extLst xmlns:a="http://schemas.openxmlformats.org/drawingml/2006/main">
               <a:ext uri="{FF2B5EF4-FFF2-40B4-BE49-F238E27FC236}">
-                <a16:creationId xmlns:a16="http://schemas.microsoft.com/office/drawing/2014/main" id="{B01F3DC4-BE96-4028-B167-302CF054525E}"/>
+                <a16:creationId xmlns:a16="http://schemas.microsoft.com/office/drawing/2014/main" id="{0BD44E22-69AD-42CB-BADF-5D201D34D553}"/>
               </a:ext>
             </a:extLst>
           </p:cNvPr>
@@ -11958,7 +12158,7 @@
           <p:cNvPr id="4" name="">
             <a:extLst xmlns:a="http://schemas.openxmlformats.org/drawingml/2006/main">
               <a:ext uri="{FF2B5EF4-FFF2-40B4-BE49-F238E27FC236}">
-                <a16:creationId xmlns:a16="http://schemas.microsoft.com/office/drawing/2014/main" id="{74C18086-A7B7-4AC7-9E9B-6481D42C3903}"/>
+                <a16:creationId xmlns:a16="http://schemas.microsoft.com/office/drawing/2014/main" id="{9943E612-8E18-4DAF-92E2-8763BA2D9986}"/>
               </a:ext>
             </a:extLst>
           </p:cNvPr>
@@ -12015,7 +12215,7 @@
           <p:cNvPr id="5" name="">
             <a:extLst xmlns:a="http://schemas.openxmlformats.org/drawingml/2006/main">
               <a:ext uri="{FF2B5EF4-FFF2-40B4-BE49-F238E27FC236}">
-                <a16:creationId xmlns:a16="http://schemas.microsoft.com/office/drawing/2014/main" id="{4F2E1B03-2712-48F5-A597-4608A3B709DF}"/>
+                <a16:creationId xmlns:a16="http://schemas.microsoft.com/office/drawing/2014/main" id="{9A7D6BD7-3FB8-4E0D-850A-4D48C9BB5766}"/>
               </a:ext>
             </a:extLst>
           </p:cNvPr>
@@ -12072,7 +12272,7 @@
           <p:cNvPr id="6" name="">
             <a:extLst xmlns:a="http://schemas.openxmlformats.org/drawingml/2006/main">
               <a:ext uri="{FF2B5EF4-FFF2-40B4-BE49-F238E27FC236}">
-                <a16:creationId xmlns:a16="http://schemas.microsoft.com/office/drawing/2014/main" id="{6ADA1EDC-6DAC-48D3-91E5-9079C8B48DF0}"/>
+                <a16:creationId xmlns:a16="http://schemas.microsoft.com/office/drawing/2014/main" id="{7201049C-0C09-4C66-8021-D4919B0BD88A}"/>
               </a:ext>
             </a:extLst>
           </p:cNvPr>
@@ -12129,7 +12329,7 @@
           <p:cNvPr id="7" name="">
             <a:extLst xmlns:a="http://schemas.openxmlformats.org/drawingml/2006/main">
               <a:ext uri="{FF2B5EF4-FFF2-40B4-BE49-F238E27FC236}">
-                <a16:creationId xmlns:a16="http://schemas.microsoft.com/office/drawing/2014/main" id="{37928BAA-8833-4E12-9771-E1FEEFBA698D}"/>
+                <a16:creationId xmlns:a16="http://schemas.microsoft.com/office/drawing/2014/main" id="{EF79E3E4-F7F0-441F-BE4A-0F897D3C5F55}"/>
               </a:ext>
             </a:extLst>
           </p:cNvPr>
@@ -12161,7 +12361,7 @@
           <p:cNvPr id="8" name="">
             <a:extLst xmlns:a="http://schemas.openxmlformats.org/drawingml/2006/main">
               <a:ext uri="{FF2B5EF4-FFF2-40B4-BE49-F238E27FC236}">
-                <a16:creationId xmlns:a16="http://schemas.microsoft.com/office/drawing/2014/main" id="{F68D1816-9DDF-473C-8585-FE308458E0B3}"/>
+                <a16:creationId xmlns:a16="http://schemas.microsoft.com/office/drawing/2014/main" id="{535A8386-EBA7-449F-86C9-1F1D7AE7C7CE}"/>
               </a:ext>
             </a:extLst>
           </p:cNvPr>
@@ -12218,7 +12418,7 @@
           <p:cNvPr id="9" name="">
             <a:extLst xmlns:a="http://schemas.openxmlformats.org/drawingml/2006/main">
               <a:ext uri="{FF2B5EF4-FFF2-40B4-BE49-F238E27FC236}">
-                <a16:creationId xmlns:a16="http://schemas.microsoft.com/office/drawing/2014/main" id="{37C3185C-07C9-40B8-A7E1-BE13C8DB432E}"/>
+                <a16:creationId xmlns:a16="http://schemas.microsoft.com/office/drawing/2014/main" id="{3A6FEE03-FB34-4C21-A028-DDF753A50777}"/>
               </a:ext>
             </a:extLst>
           </p:cNvPr>
@@ -12275,7 +12475,7 @@
           <p:cNvPr id="10" name="">
             <a:extLst xmlns:a="http://schemas.openxmlformats.org/drawingml/2006/main">
               <a:ext uri="{FF2B5EF4-FFF2-40B4-BE49-F238E27FC236}">
-                <a16:creationId xmlns:a16="http://schemas.microsoft.com/office/drawing/2014/main" id="{2CB074EB-5D4A-442B-99C3-8BC4E8E4E6FB}"/>
+                <a16:creationId xmlns:a16="http://schemas.microsoft.com/office/drawing/2014/main" id="{0A36444F-A695-4F82-B28D-5CB1C2690414}"/>
               </a:ext>
             </a:extLst>
           </p:cNvPr>
@@ -12309,7 +12509,7 @@
           <p:cNvPr id="11" name="">
             <a:extLst xmlns:a="http://schemas.openxmlformats.org/drawingml/2006/main">
               <a:ext uri="{FF2B5EF4-FFF2-40B4-BE49-F238E27FC236}">
-                <a16:creationId xmlns:a16="http://schemas.microsoft.com/office/drawing/2014/main" id="{4F7FBC92-5AF1-4FB5-BEB0-1BD0476DFC68}"/>
+                <a16:creationId xmlns:a16="http://schemas.microsoft.com/office/drawing/2014/main" id="{93411FAD-6BA0-4217-B91B-BDCCCFBFB01E}"/>
               </a:ext>
             </a:extLst>
           </p:cNvPr>
@@ -12341,7 +12541,7 @@
           <p:cNvPr id="12" name="">
             <a:extLst xmlns:a="http://schemas.openxmlformats.org/drawingml/2006/main">
               <a:ext uri="{FF2B5EF4-FFF2-40B4-BE49-F238E27FC236}">
-                <a16:creationId xmlns:a16="http://schemas.microsoft.com/office/drawing/2014/main" id="{38E00A71-FDB8-4B08-A490-4744FC70D8A8}"/>
+                <a16:creationId xmlns:a16="http://schemas.microsoft.com/office/drawing/2014/main" id="{6ED8CDB6-7CBD-495E-898F-BAFAAC3670F9}"/>
               </a:ext>
             </a:extLst>
           </p:cNvPr>
@@ -12398,7 +12598,7 @@
           <p:cNvPr id="13" name="">
             <a:extLst xmlns:a="http://schemas.openxmlformats.org/drawingml/2006/main">
               <a:ext uri="{FF2B5EF4-FFF2-40B4-BE49-F238E27FC236}">
-                <a16:creationId xmlns:a16="http://schemas.microsoft.com/office/drawing/2014/main" id="{E9317C68-3580-4E09-81D4-76D202C72826}"/>
+                <a16:creationId xmlns:a16="http://schemas.microsoft.com/office/drawing/2014/main" id="{178A174B-3EC8-402F-ABE5-E27F34B816E9}"/>
               </a:ext>
             </a:extLst>
           </p:cNvPr>
@@ -12455,7 +12655,7 @@
           <p:cNvPr id="14" name="">
             <a:extLst xmlns:a="http://schemas.openxmlformats.org/drawingml/2006/main">
               <a:ext uri="{FF2B5EF4-FFF2-40B4-BE49-F238E27FC236}">
-                <a16:creationId xmlns:a16="http://schemas.microsoft.com/office/drawing/2014/main" id="{49FFC453-5647-4E17-96DB-8FB1CFBBE1ED}"/>
+                <a16:creationId xmlns:a16="http://schemas.microsoft.com/office/drawing/2014/main" id="{9ABEF6D9-D716-4F5E-ADAA-97A4E05C1A74}"/>
               </a:ext>
             </a:extLst>
           </p:cNvPr>
@@ -12489,7 +12689,7 @@
           <p:cNvPr id="15" name="">
             <a:extLst xmlns:a="http://schemas.openxmlformats.org/drawingml/2006/main">
               <a:ext uri="{FF2B5EF4-FFF2-40B4-BE49-F238E27FC236}">
-                <a16:creationId xmlns:a16="http://schemas.microsoft.com/office/drawing/2014/main" id="{6E02FF2B-1DB7-4133-9C49-B43937EE787F}"/>
+                <a16:creationId xmlns:a16="http://schemas.microsoft.com/office/drawing/2014/main" id="{08E6385A-7A70-40B5-9DBF-190768C2E3F7}"/>
               </a:ext>
             </a:extLst>
           </p:cNvPr>
@@ -12521,7 +12721,7 @@
           <p:cNvPr id="16" name="">
             <a:extLst xmlns:a="http://schemas.openxmlformats.org/drawingml/2006/main">
               <a:ext uri="{FF2B5EF4-FFF2-40B4-BE49-F238E27FC236}">
-                <a16:creationId xmlns:a16="http://schemas.microsoft.com/office/drawing/2014/main" id="{13DE4E16-5A5A-4624-9DE6-149E8D3A49D4}"/>
+                <a16:creationId xmlns:a16="http://schemas.microsoft.com/office/drawing/2014/main" id="{5C4AC3EC-E34C-4D67-B4F4-8A2296EF0A1D}"/>
               </a:ext>
             </a:extLst>
           </p:cNvPr>
@@ -12578,7 +12778,7 @@
           <p:cNvPr id="17" name="">
             <a:extLst xmlns:a="http://schemas.openxmlformats.org/drawingml/2006/main">
               <a:ext uri="{FF2B5EF4-FFF2-40B4-BE49-F238E27FC236}">
-                <a16:creationId xmlns:a16="http://schemas.microsoft.com/office/drawing/2014/main" id="{9ABB60BB-D726-4EED-AF51-E3B36579AF42}"/>
+                <a16:creationId xmlns:a16="http://schemas.microsoft.com/office/drawing/2014/main" id="{03A21615-EC40-4281-B932-0E91C84208E3}"/>
               </a:ext>
             </a:extLst>
           </p:cNvPr>
@@ -12635,7 +12835,7 @@
           <p:cNvPr id="18" name="">
             <a:extLst xmlns:a="http://schemas.openxmlformats.org/drawingml/2006/main">
               <a:ext uri="{FF2B5EF4-FFF2-40B4-BE49-F238E27FC236}">
-                <a16:creationId xmlns:a16="http://schemas.microsoft.com/office/drawing/2014/main" id="{775483EF-5A5E-49B4-986F-24DC7BE3460F}"/>
+                <a16:creationId xmlns:a16="http://schemas.microsoft.com/office/drawing/2014/main" id="{41AA225A-FBDB-48EA-8A97-C7D2C664651A}"/>
               </a:ext>
             </a:extLst>
           </p:cNvPr>
@@ -12669,7 +12869,7 @@
           <p:cNvPr id="19" name="">
             <a:extLst xmlns:a="http://schemas.openxmlformats.org/drawingml/2006/main">
               <a:ext uri="{FF2B5EF4-FFF2-40B4-BE49-F238E27FC236}">
-                <a16:creationId xmlns:a16="http://schemas.microsoft.com/office/drawing/2014/main" id="{A1BEBA61-0D78-4340-B631-AB4049B9D14E}"/>
+                <a16:creationId xmlns:a16="http://schemas.microsoft.com/office/drawing/2014/main" id="{D1B8D71A-EFF2-4406-A56B-0DB9DA1AF244}"/>
               </a:ext>
             </a:extLst>
           </p:cNvPr>
@@ -12701,7 +12901,7 @@
           <p:cNvPr id="20" name="">
             <a:extLst xmlns:a="http://schemas.openxmlformats.org/drawingml/2006/main">
               <a:ext uri="{FF2B5EF4-FFF2-40B4-BE49-F238E27FC236}">
-                <a16:creationId xmlns:a16="http://schemas.microsoft.com/office/drawing/2014/main" id="{16B8088D-AEC6-4EE2-81E4-CDE313FA5F3A}"/>
+                <a16:creationId xmlns:a16="http://schemas.microsoft.com/office/drawing/2014/main" id="{E0755F1A-40CE-4DE4-8BBE-E9199856F842}"/>
               </a:ext>
             </a:extLst>
           </p:cNvPr>
@@ -12758,7 +12958,7 @@
           <p:cNvPr id="21" name="">
             <a:extLst xmlns:a="http://schemas.openxmlformats.org/drawingml/2006/main">
               <a:ext uri="{FF2B5EF4-FFF2-40B4-BE49-F238E27FC236}">
-                <a16:creationId xmlns:a16="http://schemas.microsoft.com/office/drawing/2014/main" id="{AC170B5D-E621-4E5D-BFB7-AF573ADD7278}"/>
+                <a16:creationId xmlns:a16="http://schemas.microsoft.com/office/drawing/2014/main" id="{E1399574-F0F6-465B-9948-F7B0AF3AD55A}"/>
               </a:ext>
             </a:extLst>
           </p:cNvPr>
@@ -12815,7 +13015,7 @@
           <p:cNvPr id="22" name="">
             <a:extLst xmlns:a="http://schemas.openxmlformats.org/drawingml/2006/main">
               <a:ext uri="{FF2B5EF4-FFF2-40B4-BE49-F238E27FC236}">
-                <a16:creationId xmlns:a16="http://schemas.microsoft.com/office/drawing/2014/main" id="{0A9944C4-3DE8-4C79-A765-2EB266BA3028}"/>
+                <a16:creationId xmlns:a16="http://schemas.microsoft.com/office/drawing/2014/main" id="{D8772E48-0324-4371-9E49-FC000C3B9824}"/>
               </a:ext>
             </a:extLst>
           </p:cNvPr>
@@ -12870,7 +13070,7 @@
     </p:spTree>
     <p:extLst>
       <p:ext uri="{BB962C8B-B14F-4D97-AF65-F5344CB8AC3E}">
-        <p14:creationId xmlns:p14="http://schemas.microsoft.com/office/powerpoint/2010/main" val="853282219"/>
+        <p14:creationId xmlns:p14="http://schemas.microsoft.com/office/powerpoint/2010/main" val="2046604325"/>
       </p:ext>
     </p:extLst>
   </p:cSld>
@@ -13071,7 +13271,7 @@
           <p:cNvPr id="22" name="">
             <a:extLst xmlns:a="http://schemas.openxmlformats.org/drawingml/2006/main">
               <a:ext uri="{FF2B5EF4-FFF2-40B4-BE49-F238E27FC236}">
-                <a16:creationId xmlns:a16="http://schemas.microsoft.com/office/drawing/2014/main" id="{0056E6D8-C917-404F-ABBB-3C1D2557ED78}"/>
+                <a16:creationId xmlns:a16="http://schemas.microsoft.com/office/drawing/2014/main" id="{AC51E5EB-B68D-44AC-91D7-ED99F1BE86D7}"/>
               </a:ext>
             </a:extLst>
           </p:cNvPr>
@@ -13103,7 +13303,7 @@
           <p:cNvPr id="2" name="">
             <a:extLst xmlns:a="http://schemas.openxmlformats.org/drawingml/2006/main">
               <a:ext uri="{FF2B5EF4-FFF2-40B4-BE49-F238E27FC236}">
-                <a16:creationId xmlns:a16="http://schemas.microsoft.com/office/drawing/2014/main" id="{AA5439D9-FF2A-418A-B717-C7BEBBB98475}"/>
+                <a16:creationId xmlns:a16="http://schemas.microsoft.com/office/drawing/2014/main" id="{B00A5585-6C9F-4132-A1E6-0FA0644B1F23}"/>
               </a:ext>
             </a:extLst>
           </p:cNvPr>
@@ -13160,7 +13360,7 @@
           <p:cNvPr id="3" name="">
             <a:extLst xmlns:a="http://schemas.openxmlformats.org/drawingml/2006/main">
               <a:ext uri="{FF2B5EF4-FFF2-40B4-BE49-F238E27FC236}">
-                <a16:creationId xmlns:a16="http://schemas.microsoft.com/office/drawing/2014/main" id="{F1F98155-835C-47BA-91E3-63FCF0BF6FB9}"/>
+                <a16:creationId xmlns:a16="http://schemas.microsoft.com/office/drawing/2014/main" id="{D2F6E41B-2755-409F-9E9E-7CA63AB37EC0}"/>
               </a:ext>
             </a:extLst>
           </p:cNvPr>
@@ -13192,7 +13392,7 @@
           <p:cNvPr id="4" name="">
             <a:extLst xmlns:a="http://schemas.openxmlformats.org/drawingml/2006/main">
               <a:ext uri="{FF2B5EF4-FFF2-40B4-BE49-F238E27FC236}">
-                <a16:creationId xmlns:a16="http://schemas.microsoft.com/office/drawing/2014/main" id="{A9DFE15F-A268-40A0-95F4-CC51BE0CCD67}"/>
+                <a16:creationId xmlns:a16="http://schemas.microsoft.com/office/drawing/2014/main" id="{77AA75A6-8520-4540-865F-A2A21DBB00D5}"/>
               </a:ext>
             </a:extLst>
           </p:cNvPr>
@@ -13249,7 +13449,7 @@
           <p:cNvPr id="5" name="">
             <a:extLst xmlns:a="http://schemas.openxmlformats.org/drawingml/2006/main">
               <a:ext uri="{FF2B5EF4-FFF2-40B4-BE49-F238E27FC236}">
-                <a16:creationId xmlns:a16="http://schemas.microsoft.com/office/drawing/2014/main" id="{ADA24342-CC0C-4812-BB0C-9C3DA0BB7BDA}"/>
+                <a16:creationId xmlns:a16="http://schemas.microsoft.com/office/drawing/2014/main" id="{9E1FD250-18B9-4484-9CCA-F2DABEE7C477}"/>
               </a:ext>
             </a:extLst>
           </p:cNvPr>
@@ -13306,7 +13506,7 @@
           <p:cNvPr id="6" name="">
             <a:extLst xmlns:a="http://schemas.openxmlformats.org/drawingml/2006/main">
               <a:ext uri="{FF2B5EF4-FFF2-40B4-BE49-F238E27FC236}">
-                <a16:creationId xmlns:a16="http://schemas.microsoft.com/office/drawing/2014/main" id="{43E534BE-39F4-4D4D-B3A2-9347554DA8C2}"/>
+                <a16:creationId xmlns:a16="http://schemas.microsoft.com/office/drawing/2014/main" id="{F7CC35DC-09C9-4EB2-9050-C62B441097A2}"/>
               </a:ext>
             </a:extLst>
           </p:cNvPr>
@@ -13363,7 +13563,7 @@
           <p:cNvPr id="7" name="">
             <a:extLst xmlns:a="http://schemas.openxmlformats.org/drawingml/2006/main">
               <a:ext uri="{FF2B5EF4-FFF2-40B4-BE49-F238E27FC236}">
-                <a16:creationId xmlns:a16="http://schemas.microsoft.com/office/drawing/2014/main" id="{900DD698-D69F-4BD7-9E95-9DD02BFB40A0}"/>
+                <a16:creationId xmlns:a16="http://schemas.microsoft.com/office/drawing/2014/main" id="{E2FC081F-ED98-4CD6-B8D0-91C511B877E6}"/>
               </a:ext>
             </a:extLst>
           </p:cNvPr>
@@ -13395,7 +13595,7 @@
           <p:cNvPr id="8" name="">
             <a:extLst xmlns:a="http://schemas.openxmlformats.org/drawingml/2006/main">
               <a:ext uri="{FF2B5EF4-FFF2-40B4-BE49-F238E27FC236}">
-                <a16:creationId xmlns:a16="http://schemas.microsoft.com/office/drawing/2014/main" id="{7B4154C0-F0C7-410A-A050-A7475F2F71E4}"/>
+                <a16:creationId xmlns:a16="http://schemas.microsoft.com/office/drawing/2014/main" id="{DC764FC5-EA3A-4D2D-8BF0-AB608957B15E}"/>
               </a:ext>
             </a:extLst>
           </p:cNvPr>
@@ -13452,7 +13652,7 @@
           <p:cNvPr id="9" name="">
             <a:extLst xmlns:a="http://schemas.openxmlformats.org/drawingml/2006/main">
               <a:ext uri="{FF2B5EF4-FFF2-40B4-BE49-F238E27FC236}">
-                <a16:creationId xmlns:a16="http://schemas.microsoft.com/office/drawing/2014/main" id="{55CB6516-DF21-429C-891A-64B87C13E4C2}"/>
+                <a16:creationId xmlns:a16="http://schemas.microsoft.com/office/drawing/2014/main" id="{D303AF2D-C271-4865-A041-C8FD73BDEEB0}"/>
               </a:ext>
             </a:extLst>
           </p:cNvPr>
@@ -13509,7 +13709,7 @@
           <p:cNvPr id="10" name="">
             <a:extLst xmlns:a="http://schemas.openxmlformats.org/drawingml/2006/main">
               <a:ext uri="{FF2B5EF4-FFF2-40B4-BE49-F238E27FC236}">
-                <a16:creationId xmlns:a16="http://schemas.microsoft.com/office/drawing/2014/main" id="{E8B395C3-7417-4634-B02E-9294B67E4A9A}"/>
+                <a16:creationId xmlns:a16="http://schemas.microsoft.com/office/drawing/2014/main" id="{40570870-3BA0-4CC6-9D6E-BE19B3EC6DFC}"/>
               </a:ext>
             </a:extLst>
           </p:cNvPr>
@@ -13543,7 +13743,7 @@
           <p:cNvPr id="11" name="">
             <a:extLst xmlns:a="http://schemas.openxmlformats.org/drawingml/2006/main">
               <a:ext uri="{FF2B5EF4-FFF2-40B4-BE49-F238E27FC236}">
-                <a16:creationId xmlns:a16="http://schemas.microsoft.com/office/drawing/2014/main" id="{0F03979A-9CD0-4F15-93C2-61BB32F2B5F1}"/>
+                <a16:creationId xmlns:a16="http://schemas.microsoft.com/office/drawing/2014/main" id="{654B540A-E780-442A-9D2C-12C1FE221076}"/>
               </a:ext>
             </a:extLst>
           </p:cNvPr>
@@ -13575,7 +13775,7 @@
           <p:cNvPr id="12" name="">
             <a:extLst xmlns:a="http://schemas.openxmlformats.org/drawingml/2006/main">
               <a:ext uri="{FF2B5EF4-FFF2-40B4-BE49-F238E27FC236}">
-                <a16:creationId xmlns:a16="http://schemas.microsoft.com/office/drawing/2014/main" id="{FD55432A-6A3F-4157-8F50-D2C4CF96FA24}"/>
+                <a16:creationId xmlns:a16="http://schemas.microsoft.com/office/drawing/2014/main" id="{C3326857-A73D-40B0-9531-C0E11806B11C}"/>
               </a:ext>
             </a:extLst>
           </p:cNvPr>
@@ -13632,7 +13832,7 @@
           <p:cNvPr id="13" name="">
             <a:extLst xmlns:a="http://schemas.openxmlformats.org/drawingml/2006/main">
               <a:ext uri="{FF2B5EF4-FFF2-40B4-BE49-F238E27FC236}">
-                <a16:creationId xmlns:a16="http://schemas.microsoft.com/office/drawing/2014/main" id="{7FDEA88B-0831-475A-8213-8717A5F6399B}"/>
+                <a16:creationId xmlns:a16="http://schemas.microsoft.com/office/drawing/2014/main" id="{7D141B44-EB51-41EF-83B2-B9D52953436A}"/>
               </a:ext>
             </a:extLst>
           </p:cNvPr>
@@ -13689,7 +13889,7 @@
           <p:cNvPr id="14" name="">
             <a:extLst xmlns:a="http://schemas.openxmlformats.org/drawingml/2006/main">
               <a:ext uri="{FF2B5EF4-FFF2-40B4-BE49-F238E27FC236}">
-                <a16:creationId xmlns:a16="http://schemas.microsoft.com/office/drawing/2014/main" id="{369E84E5-BDA4-45A9-BF2C-5663B44E0F2D}"/>
+                <a16:creationId xmlns:a16="http://schemas.microsoft.com/office/drawing/2014/main" id="{1B780906-3CE9-45C4-A72D-4249D7AAF408}"/>
               </a:ext>
             </a:extLst>
           </p:cNvPr>
@@ -13723,7 +13923,7 @@
           <p:cNvPr id="15" name="">
             <a:extLst xmlns:a="http://schemas.openxmlformats.org/drawingml/2006/main">
               <a:ext uri="{FF2B5EF4-FFF2-40B4-BE49-F238E27FC236}">
-                <a16:creationId xmlns:a16="http://schemas.microsoft.com/office/drawing/2014/main" id="{21E31B8B-0142-46C6-B716-E0A344991C66}"/>
+                <a16:creationId xmlns:a16="http://schemas.microsoft.com/office/drawing/2014/main" id="{443715AC-9EA5-4C02-9B8F-3BE23591F683}"/>
               </a:ext>
             </a:extLst>
           </p:cNvPr>
@@ -13755,7 +13955,7 @@
           <p:cNvPr id="16" name="">
             <a:extLst xmlns:a="http://schemas.openxmlformats.org/drawingml/2006/main">
               <a:ext uri="{FF2B5EF4-FFF2-40B4-BE49-F238E27FC236}">
-                <a16:creationId xmlns:a16="http://schemas.microsoft.com/office/drawing/2014/main" id="{83585F03-7C1A-454A-80D6-67B4CE6DA269}"/>
+                <a16:creationId xmlns:a16="http://schemas.microsoft.com/office/drawing/2014/main" id="{9C3AE04A-02EC-4B3D-BAF4-9563AAAC8B99}"/>
               </a:ext>
             </a:extLst>
           </p:cNvPr>
@@ -13812,7 +14012,7 @@
           <p:cNvPr id="17" name="">
             <a:extLst xmlns:a="http://schemas.openxmlformats.org/drawingml/2006/main">
               <a:ext uri="{FF2B5EF4-FFF2-40B4-BE49-F238E27FC236}">
-                <a16:creationId xmlns:a16="http://schemas.microsoft.com/office/drawing/2014/main" id="{61EDB478-C3F0-4606-AB17-EA5252B291C7}"/>
+                <a16:creationId xmlns:a16="http://schemas.microsoft.com/office/drawing/2014/main" id="{DB197938-EEE6-41CE-934D-3F05E45EF924}"/>
               </a:ext>
             </a:extLst>
           </p:cNvPr>
@@ -13869,7 +14069,7 @@
           <p:cNvPr id="18" name="">
             <a:extLst xmlns:a="http://schemas.openxmlformats.org/drawingml/2006/main">
               <a:ext uri="{FF2B5EF4-FFF2-40B4-BE49-F238E27FC236}">
-                <a16:creationId xmlns:a16="http://schemas.microsoft.com/office/drawing/2014/main" id="{D9548826-63D5-4E59-9EB6-3555B96539BF}"/>
+                <a16:creationId xmlns:a16="http://schemas.microsoft.com/office/drawing/2014/main" id="{DFFB1E5B-FC17-4B69-BD9B-090CA7322B4C}"/>
               </a:ext>
             </a:extLst>
           </p:cNvPr>
@@ -13903,7 +14103,7 @@
           <p:cNvPr id="19" name="">
             <a:extLst xmlns:a="http://schemas.openxmlformats.org/drawingml/2006/main">
               <a:ext uri="{FF2B5EF4-FFF2-40B4-BE49-F238E27FC236}">
-                <a16:creationId xmlns:a16="http://schemas.microsoft.com/office/drawing/2014/main" id="{27769876-C739-470C-A00D-041F62BE470C}"/>
+                <a16:creationId xmlns:a16="http://schemas.microsoft.com/office/drawing/2014/main" id="{83913F1E-EBE1-48D3-9478-9B5123E69072}"/>
               </a:ext>
             </a:extLst>
           </p:cNvPr>
@@ -13935,7 +14135,7 @@
           <p:cNvPr id="20" name="">
             <a:extLst xmlns:a="http://schemas.openxmlformats.org/drawingml/2006/main">
               <a:ext uri="{FF2B5EF4-FFF2-40B4-BE49-F238E27FC236}">
-                <a16:creationId xmlns:a16="http://schemas.microsoft.com/office/drawing/2014/main" id="{4DB8EC09-F382-4E28-80DC-0D456D4C2127}"/>
+                <a16:creationId xmlns:a16="http://schemas.microsoft.com/office/drawing/2014/main" id="{0FF328F5-7806-4B5F-BB16-B6441DA5C0F7}"/>
               </a:ext>
             </a:extLst>
           </p:cNvPr>
@@ -13992,7 +14192,7 @@
           <p:cNvPr id="21" name="">
             <a:extLst xmlns:a="http://schemas.openxmlformats.org/drawingml/2006/main">
               <a:ext uri="{FF2B5EF4-FFF2-40B4-BE49-F238E27FC236}">
-                <a16:creationId xmlns:a16="http://schemas.microsoft.com/office/drawing/2014/main" id="{2CD3722B-540A-491B-A677-4FD977459CBB}"/>
+                <a16:creationId xmlns:a16="http://schemas.microsoft.com/office/drawing/2014/main" id="{25E8F32E-D087-4856-B9DB-E4D435BA28B6}"/>
               </a:ext>
             </a:extLst>
           </p:cNvPr>
@@ -14047,7 +14247,7 @@
     </p:spTree>
     <p:extLst>
       <p:ext uri="{BB962C8B-B14F-4D97-AF65-F5344CB8AC3E}">
-        <p14:creationId xmlns:p14="http://schemas.microsoft.com/office/powerpoint/2010/main" val="758182154"/>
+        <p14:creationId xmlns:p14="http://schemas.microsoft.com/office/powerpoint/2010/main" val="1468130475"/>
       </p:ext>
     </p:extLst>
   </p:cSld>
